--- a/Progress_4GL_Basics_Training.pptx
+++ b/Progress_4GL_Basics_Training.pptx
@@ -5,19 +5,19 @@
     <p:sldMasterId id="2147483648" r:id="rId1"/>
   </p:sldMasterIdLst>
   <p:sldIdLst>
-    <p:sldId id="256" r:id="rId7"/>
-    <p:sldId id="257" r:id="rId8"/>
-    <p:sldId id="258" r:id="rId9"/>
-    <p:sldId id="259" r:id="rId10"/>
-    <p:sldId id="260" r:id="rId11"/>
-    <p:sldId id="261" r:id="rId12"/>
-    <p:sldId id="262" r:id="rId13"/>
-    <p:sldId id="263" r:id="rId14"/>
-    <p:sldId id="264" r:id="rId15"/>
-    <p:sldId id="265" r:id="rId16"/>
-    <p:sldId id="266" r:id="rId17"/>
-    <p:sldId id="267" r:id="rId18"/>
-    <p:sldId id="268" r:id="rId19"/>
+    <p:sldId id="256" r:id="rId2"/>
+    <p:sldId id="257" r:id="rId3"/>
+    <p:sldId id="258" r:id="rId4"/>
+    <p:sldId id="259" r:id="rId5"/>
+    <p:sldId id="260" r:id="rId6"/>
+    <p:sldId id="261" r:id="rId7"/>
+    <p:sldId id="262" r:id="rId8"/>
+    <p:sldId id="263" r:id="rId9"/>
+    <p:sldId id="264" r:id="rId10"/>
+    <p:sldId id="265" r:id="rId11"/>
+    <p:sldId id="266" r:id="rId12"/>
+    <p:sldId id="267" r:id="rId13"/>
+    <p:sldId id="268" r:id="rId14"/>
   </p:sldIdLst>
   <p:sldSz cx="9144000" cy="6858000" type="screen4x3"/>
   <p:notesSz cx="6858000" cy="9144000"/>
@@ -116,6 +116,22 @@
       </a:defRPr>
     </a:lvl9pPr>
   </p:defaultTextStyle>
+  <p:extLst>
+    <p:ext uri="{EFAFB233-063F-42B5-8137-9DF3F51BA10A}">
+      <p15:sldGuideLst xmlns:p15="http://schemas.microsoft.com/office/powerpoint/2012/main">
+        <p15:guide id="1" orient="horz" pos="2160">
+          <p15:clr>
+            <a:srgbClr val="A4A3A4"/>
+          </p15:clr>
+        </p15:guide>
+        <p15:guide id="2" pos="2880">
+          <p15:clr>
+            <a:srgbClr val="A4A3A4"/>
+          </p15:clr>
+        </p15:guide>
+      </p15:sldGuideLst>
+    </p:ext>
+  </p:extLst>
 </p:presentation>
 </file>
 
@@ -157,10 +173,9 @@
           <a:lstStyle/>
           <a:p>
             <a:r>
-              <a:rPr lang="en-US" smtClean="0"/>
+              <a:rPr lang="en-US"/>
               <a:t>Click to edit Master title style</a:t>
             </a:r>
-            <a:endParaRPr lang="en-US"/>
           </a:p>
         </p:txBody>
       </p:sp>
@@ -276,10 +291,9 @@
           </a:lstStyle>
           <a:p>
             <a:r>
-              <a:rPr lang="en-US" smtClean="0"/>
+              <a:rPr lang="en-US"/>
               <a:t>Click to edit Master subtitle style</a:t>
             </a:r>
-            <a:endParaRPr lang="en-US"/>
           </a:p>
         </p:txBody>
       </p:sp>
@@ -300,7 +314,7 @@
           <a:p>
             <a:fld id="{5BCAD085-E8A6-8845-BD4E-CB4CCA059FC4}" type="datetimeFigureOut">
               <a:rPr lang="en-US" smtClean="0"/>
-              <a:t>1/27/13</a:t>
+              <a:t>5/7/2026</a:t>
             </a:fld>
             <a:endParaRPr lang="en-US"/>
           </a:p>
@@ -394,10 +408,9 @@
           <a:lstStyle/>
           <a:p>
             <a:r>
-              <a:rPr lang="en-US" smtClean="0"/>
+              <a:rPr lang="en-US"/>
               <a:t>Click to edit Master title style</a:t>
             </a:r>
-            <a:endParaRPr lang="en-US"/>
           </a:p>
         </p:txBody>
       </p:sp>
@@ -418,38 +431,37 @@
           <a:p>
             <a:pPr lvl="0"/>
             <a:r>
-              <a:rPr lang="en-US" smtClean="0"/>
+              <a:rPr lang="en-US"/>
               <a:t>Click to edit Master text styles</a:t>
             </a:r>
           </a:p>
           <a:p>
             <a:pPr lvl="1"/>
             <a:r>
-              <a:rPr lang="en-US" smtClean="0"/>
+              <a:rPr lang="en-US"/>
               <a:t>Second level</a:t>
             </a:r>
           </a:p>
           <a:p>
             <a:pPr lvl="2"/>
             <a:r>
-              <a:rPr lang="en-US" smtClean="0"/>
+              <a:rPr lang="en-US"/>
               <a:t>Third level</a:t>
             </a:r>
           </a:p>
           <a:p>
             <a:pPr lvl="3"/>
             <a:r>
-              <a:rPr lang="en-US" smtClean="0"/>
+              <a:rPr lang="en-US"/>
               <a:t>Fourth level</a:t>
             </a:r>
           </a:p>
           <a:p>
             <a:pPr lvl="4"/>
             <a:r>
-              <a:rPr lang="en-US" smtClean="0"/>
+              <a:rPr lang="en-US"/>
               <a:t>Fifth level</a:t>
             </a:r>
-            <a:endParaRPr lang="en-US"/>
           </a:p>
         </p:txBody>
       </p:sp>
@@ -470,7 +482,7 @@
           <a:p>
             <a:fld id="{5BCAD085-E8A6-8845-BD4E-CB4CCA059FC4}" type="datetimeFigureOut">
               <a:rPr lang="en-US" smtClean="0"/>
-              <a:t>1/27/13</a:t>
+              <a:t>5/7/2026</a:t>
             </a:fld>
             <a:endParaRPr lang="en-US"/>
           </a:p>
@@ -569,10 +581,9 @@
           <a:lstStyle/>
           <a:p>
             <a:r>
-              <a:rPr lang="en-US" smtClean="0"/>
+              <a:rPr lang="en-US"/>
               <a:t>Click to edit Master title style</a:t>
             </a:r>
-            <a:endParaRPr lang="en-US"/>
           </a:p>
         </p:txBody>
       </p:sp>
@@ -598,38 +609,37 @@
           <a:p>
             <a:pPr lvl="0"/>
             <a:r>
-              <a:rPr lang="en-US" smtClean="0"/>
+              <a:rPr lang="en-US"/>
               <a:t>Click to edit Master text styles</a:t>
             </a:r>
           </a:p>
           <a:p>
             <a:pPr lvl="1"/>
             <a:r>
-              <a:rPr lang="en-US" smtClean="0"/>
+              <a:rPr lang="en-US"/>
               <a:t>Second level</a:t>
             </a:r>
           </a:p>
           <a:p>
             <a:pPr lvl="2"/>
             <a:r>
-              <a:rPr lang="en-US" smtClean="0"/>
+              <a:rPr lang="en-US"/>
               <a:t>Third level</a:t>
             </a:r>
           </a:p>
           <a:p>
             <a:pPr lvl="3"/>
             <a:r>
-              <a:rPr lang="en-US" smtClean="0"/>
+              <a:rPr lang="en-US"/>
               <a:t>Fourth level</a:t>
             </a:r>
           </a:p>
           <a:p>
             <a:pPr lvl="4"/>
             <a:r>
-              <a:rPr lang="en-US" smtClean="0"/>
+              <a:rPr lang="en-US"/>
               <a:t>Fifth level</a:t>
             </a:r>
-            <a:endParaRPr lang="en-US"/>
           </a:p>
         </p:txBody>
       </p:sp>
@@ -650,7 +660,7 @@
           <a:p>
             <a:fld id="{5BCAD085-E8A6-8845-BD4E-CB4CCA059FC4}" type="datetimeFigureOut">
               <a:rPr lang="en-US" smtClean="0"/>
-              <a:t>1/27/13</a:t>
+              <a:t>5/7/2026</a:t>
             </a:fld>
             <a:endParaRPr lang="en-US"/>
           </a:p>
@@ -744,10 +754,9 @@
           <a:lstStyle/>
           <a:p>
             <a:r>
-              <a:rPr lang="en-US" smtClean="0"/>
+              <a:rPr lang="en-US"/>
               <a:t>Click to edit Master title style</a:t>
             </a:r>
-            <a:endParaRPr lang="en-US"/>
           </a:p>
         </p:txBody>
       </p:sp>
@@ -768,38 +777,37 @@
           <a:p>
             <a:pPr lvl="0"/>
             <a:r>
-              <a:rPr lang="en-US" smtClean="0"/>
+              <a:rPr lang="en-US"/>
               <a:t>Click to edit Master text styles</a:t>
             </a:r>
           </a:p>
           <a:p>
             <a:pPr lvl="1"/>
             <a:r>
-              <a:rPr lang="en-US" smtClean="0"/>
+              <a:rPr lang="en-US"/>
               <a:t>Second level</a:t>
             </a:r>
           </a:p>
           <a:p>
             <a:pPr lvl="2"/>
             <a:r>
-              <a:rPr lang="en-US" smtClean="0"/>
+              <a:rPr lang="en-US"/>
               <a:t>Third level</a:t>
             </a:r>
           </a:p>
           <a:p>
             <a:pPr lvl="3"/>
             <a:r>
-              <a:rPr lang="en-US" smtClean="0"/>
+              <a:rPr lang="en-US"/>
               <a:t>Fourth level</a:t>
             </a:r>
           </a:p>
           <a:p>
             <a:pPr lvl="4"/>
             <a:r>
-              <a:rPr lang="en-US" smtClean="0"/>
+              <a:rPr lang="en-US"/>
               <a:t>Fifth level</a:t>
             </a:r>
-            <a:endParaRPr lang="en-US"/>
           </a:p>
         </p:txBody>
       </p:sp>
@@ -820,7 +828,7 @@
           <a:p>
             <a:fld id="{5BCAD085-E8A6-8845-BD4E-CB4CCA059FC4}" type="datetimeFigureOut">
               <a:rPr lang="en-US" smtClean="0"/>
-              <a:t>1/27/13</a:t>
+              <a:t>5/7/2026</a:t>
             </a:fld>
             <a:endParaRPr lang="en-US"/>
           </a:p>
@@ -923,10 +931,9 @@
           </a:lstStyle>
           <a:p>
             <a:r>
-              <a:rPr lang="en-US" smtClean="0"/>
+              <a:rPr lang="en-US"/>
               <a:t>Click to edit Master title style</a:t>
             </a:r>
-            <a:endParaRPr lang="en-US"/>
           </a:p>
         </p:txBody>
       </p:sp>
@@ -1043,7 +1050,7 @@
           <a:p>
             <a:pPr lvl="0"/>
             <a:r>
-              <a:rPr lang="en-US" smtClean="0"/>
+              <a:rPr lang="en-US"/>
               <a:t>Click to edit Master text styles</a:t>
             </a:r>
           </a:p>
@@ -1066,7 +1073,7 @@
           <a:p>
             <a:fld id="{5BCAD085-E8A6-8845-BD4E-CB4CCA059FC4}" type="datetimeFigureOut">
               <a:rPr lang="en-US" smtClean="0"/>
-              <a:t>1/27/13</a:t>
+              <a:t>5/7/2026</a:t>
             </a:fld>
             <a:endParaRPr lang="en-US"/>
           </a:p>
@@ -1160,10 +1167,9 @@
           <a:lstStyle/>
           <a:p>
             <a:r>
-              <a:rPr lang="en-US" smtClean="0"/>
+              <a:rPr lang="en-US"/>
               <a:t>Click to edit Master title style</a:t>
             </a:r>
-            <a:endParaRPr lang="en-US"/>
           </a:p>
         </p:txBody>
       </p:sp>
@@ -1217,38 +1223,37 @@
           <a:p>
             <a:pPr lvl="0"/>
             <a:r>
-              <a:rPr lang="en-US" smtClean="0"/>
+              <a:rPr lang="en-US"/>
               <a:t>Click to edit Master text styles</a:t>
             </a:r>
           </a:p>
           <a:p>
             <a:pPr lvl="1"/>
             <a:r>
-              <a:rPr lang="en-US" smtClean="0"/>
+              <a:rPr lang="en-US"/>
               <a:t>Second level</a:t>
             </a:r>
           </a:p>
           <a:p>
             <a:pPr lvl="2"/>
             <a:r>
-              <a:rPr lang="en-US" smtClean="0"/>
+              <a:rPr lang="en-US"/>
               <a:t>Third level</a:t>
             </a:r>
           </a:p>
           <a:p>
             <a:pPr lvl="3"/>
             <a:r>
-              <a:rPr lang="en-US" smtClean="0"/>
+              <a:rPr lang="en-US"/>
               <a:t>Fourth level</a:t>
             </a:r>
           </a:p>
           <a:p>
             <a:pPr lvl="4"/>
             <a:r>
-              <a:rPr lang="en-US" smtClean="0"/>
+              <a:rPr lang="en-US"/>
               <a:t>Fifth level</a:t>
             </a:r>
-            <a:endParaRPr lang="en-US"/>
           </a:p>
         </p:txBody>
       </p:sp>
@@ -1302,38 +1307,37 @@
           <a:p>
             <a:pPr lvl="0"/>
             <a:r>
-              <a:rPr lang="en-US" smtClean="0"/>
+              <a:rPr lang="en-US"/>
               <a:t>Click to edit Master text styles</a:t>
             </a:r>
           </a:p>
           <a:p>
             <a:pPr lvl="1"/>
             <a:r>
-              <a:rPr lang="en-US" smtClean="0"/>
+              <a:rPr lang="en-US"/>
               <a:t>Second level</a:t>
             </a:r>
           </a:p>
           <a:p>
             <a:pPr lvl="2"/>
             <a:r>
-              <a:rPr lang="en-US" smtClean="0"/>
+              <a:rPr lang="en-US"/>
               <a:t>Third level</a:t>
             </a:r>
           </a:p>
           <a:p>
             <a:pPr lvl="3"/>
             <a:r>
-              <a:rPr lang="en-US" smtClean="0"/>
+              <a:rPr lang="en-US"/>
               <a:t>Fourth level</a:t>
             </a:r>
           </a:p>
           <a:p>
             <a:pPr lvl="4"/>
             <a:r>
-              <a:rPr lang="en-US" smtClean="0"/>
+              <a:rPr lang="en-US"/>
               <a:t>Fifth level</a:t>
             </a:r>
-            <a:endParaRPr lang="en-US"/>
           </a:p>
         </p:txBody>
       </p:sp>
@@ -1354,7 +1358,7 @@
           <a:p>
             <a:fld id="{5BCAD085-E8A6-8845-BD4E-CB4CCA059FC4}" type="datetimeFigureOut">
               <a:rPr lang="en-US" smtClean="0"/>
-              <a:t>1/27/13</a:t>
+              <a:t>5/7/2026</a:t>
             </a:fld>
             <a:endParaRPr lang="en-US"/>
           </a:p>
@@ -1452,10 +1456,9 @@
           </a:lstStyle>
           <a:p>
             <a:r>
-              <a:rPr lang="en-US" smtClean="0"/>
+              <a:rPr lang="en-US"/>
               <a:t>Click to edit Master title style</a:t>
             </a:r>
-            <a:endParaRPr lang="en-US"/>
           </a:p>
         </p:txBody>
       </p:sp>
@@ -1518,7 +1521,7 @@
           <a:p>
             <a:pPr lvl="0"/>
             <a:r>
-              <a:rPr lang="en-US" smtClean="0"/>
+              <a:rPr lang="en-US"/>
               <a:t>Click to edit Master text styles</a:t>
             </a:r>
           </a:p>
@@ -1574,38 +1577,37 @@
           <a:p>
             <a:pPr lvl="0"/>
             <a:r>
-              <a:rPr lang="en-US" smtClean="0"/>
+              <a:rPr lang="en-US"/>
               <a:t>Click to edit Master text styles</a:t>
             </a:r>
           </a:p>
           <a:p>
             <a:pPr lvl="1"/>
             <a:r>
-              <a:rPr lang="en-US" smtClean="0"/>
+              <a:rPr lang="en-US"/>
               <a:t>Second level</a:t>
             </a:r>
           </a:p>
           <a:p>
             <a:pPr lvl="2"/>
             <a:r>
-              <a:rPr lang="en-US" smtClean="0"/>
+              <a:rPr lang="en-US"/>
               <a:t>Third level</a:t>
             </a:r>
           </a:p>
           <a:p>
             <a:pPr lvl="3"/>
             <a:r>
-              <a:rPr lang="en-US" smtClean="0"/>
+              <a:rPr lang="en-US"/>
               <a:t>Fourth level</a:t>
             </a:r>
           </a:p>
           <a:p>
             <a:pPr lvl="4"/>
             <a:r>
-              <a:rPr lang="en-US" smtClean="0"/>
+              <a:rPr lang="en-US"/>
               <a:t>Fifth level</a:t>
             </a:r>
-            <a:endParaRPr lang="en-US"/>
           </a:p>
         </p:txBody>
       </p:sp>
@@ -1668,7 +1670,7 @@
           <a:p>
             <a:pPr lvl="0"/>
             <a:r>
-              <a:rPr lang="en-US" smtClean="0"/>
+              <a:rPr lang="en-US"/>
               <a:t>Click to edit Master text styles</a:t>
             </a:r>
           </a:p>
@@ -1724,38 +1726,37 @@
           <a:p>
             <a:pPr lvl="0"/>
             <a:r>
-              <a:rPr lang="en-US" smtClean="0"/>
+              <a:rPr lang="en-US"/>
               <a:t>Click to edit Master text styles</a:t>
             </a:r>
           </a:p>
           <a:p>
             <a:pPr lvl="1"/>
             <a:r>
-              <a:rPr lang="en-US" smtClean="0"/>
+              <a:rPr lang="en-US"/>
               <a:t>Second level</a:t>
             </a:r>
           </a:p>
           <a:p>
             <a:pPr lvl="2"/>
             <a:r>
-              <a:rPr lang="en-US" smtClean="0"/>
+              <a:rPr lang="en-US"/>
               <a:t>Third level</a:t>
             </a:r>
           </a:p>
           <a:p>
             <a:pPr lvl="3"/>
             <a:r>
-              <a:rPr lang="en-US" smtClean="0"/>
+              <a:rPr lang="en-US"/>
               <a:t>Fourth level</a:t>
             </a:r>
           </a:p>
           <a:p>
             <a:pPr lvl="4"/>
             <a:r>
-              <a:rPr lang="en-US" smtClean="0"/>
+              <a:rPr lang="en-US"/>
               <a:t>Fifth level</a:t>
             </a:r>
-            <a:endParaRPr lang="en-US"/>
           </a:p>
         </p:txBody>
       </p:sp>
@@ -1776,7 +1777,7 @@
           <a:p>
             <a:fld id="{5BCAD085-E8A6-8845-BD4E-CB4CCA059FC4}" type="datetimeFigureOut">
               <a:rPr lang="en-US" smtClean="0"/>
-              <a:t>1/27/13</a:t>
+              <a:t>5/7/2026</a:t>
             </a:fld>
             <a:endParaRPr lang="en-US"/>
           </a:p>
@@ -1870,10 +1871,9 @@
           <a:lstStyle/>
           <a:p>
             <a:r>
-              <a:rPr lang="en-US" smtClean="0"/>
+              <a:rPr lang="en-US"/>
               <a:t>Click to edit Master title style</a:t>
             </a:r>
-            <a:endParaRPr lang="en-US"/>
           </a:p>
         </p:txBody>
       </p:sp>
@@ -1894,7 +1894,7 @@
           <a:p>
             <a:fld id="{5BCAD085-E8A6-8845-BD4E-CB4CCA059FC4}" type="datetimeFigureOut">
               <a:rPr lang="en-US" smtClean="0"/>
-              <a:t>1/27/13</a:t>
+              <a:t>5/7/2026</a:t>
             </a:fld>
             <a:endParaRPr lang="en-US"/>
           </a:p>
@@ -1989,7 +1989,7 @@
           <a:p>
             <a:fld id="{5BCAD085-E8A6-8845-BD4E-CB4CCA059FC4}" type="datetimeFigureOut">
               <a:rPr lang="en-US" smtClean="0"/>
-              <a:t>1/27/13</a:t>
+              <a:t>5/7/2026</a:t>
             </a:fld>
             <a:endParaRPr lang="en-US"/>
           </a:p>
@@ -2092,10 +2092,9 @@
           </a:lstStyle>
           <a:p>
             <a:r>
-              <a:rPr lang="en-US" smtClean="0"/>
+              <a:rPr lang="en-US"/>
               <a:t>Click to edit Master title style</a:t>
             </a:r>
-            <a:endParaRPr lang="en-US"/>
           </a:p>
         </p:txBody>
       </p:sp>
@@ -2149,38 +2148,37 @@
           <a:p>
             <a:pPr lvl="0"/>
             <a:r>
-              <a:rPr lang="en-US" smtClean="0"/>
+              <a:rPr lang="en-US"/>
               <a:t>Click to edit Master text styles</a:t>
             </a:r>
           </a:p>
           <a:p>
             <a:pPr lvl="1"/>
             <a:r>
-              <a:rPr lang="en-US" smtClean="0"/>
+              <a:rPr lang="en-US"/>
               <a:t>Second level</a:t>
             </a:r>
           </a:p>
           <a:p>
             <a:pPr lvl="2"/>
             <a:r>
-              <a:rPr lang="en-US" smtClean="0"/>
+              <a:rPr lang="en-US"/>
               <a:t>Third level</a:t>
             </a:r>
           </a:p>
           <a:p>
             <a:pPr lvl="3"/>
             <a:r>
-              <a:rPr lang="en-US" smtClean="0"/>
+              <a:rPr lang="en-US"/>
               <a:t>Fourth level</a:t>
             </a:r>
           </a:p>
           <a:p>
             <a:pPr lvl="4"/>
             <a:r>
-              <a:rPr lang="en-US" smtClean="0"/>
+              <a:rPr lang="en-US"/>
               <a:t>Fifth level</a:t>
             </a:r>
-            <a:endParaRPr lang="en-US"/>
           </a:p>
         </p:txBody>
       </p:sp>
@@ -2243,7 +2241,7 @@
           <a:p>
             <a:pPr lvl="0"/>
             <a:r>
-              <a:rPr lang="en-US" smtClean="0"/>
+              <a:rPr lang="en-US"/>
               <a:t>Click to edit Master text styles</a:t>
             </a:r>
           </a:p>
@@ -2266,7 +2264,7 @@
           <a:p>
             <a:fld id="{5BCAD085-E8A6-8845-BD4E-CB4CCA059FC4}" type="datetimeFigureOut">
               <a:rPr lang="en-US" smtClean="0"/>
-              <a:t>1/27/13</a:t>
+              <a:t>5/7/2026</a:t>
             </a:fld>
             <a:endParaRPr lang="en-US"/>
           </a:p>
@@ -2369,10 +2367,9 @@
           </a:lstStyle>
           <a:p>
             <a:r>
-              <a:rPr lang="en-US" smtClean="0"/>
+              <a:rPr lang="en-US"/>
               <a:t>Click to edit Master title style</a:t>
             </a:r>
-            <a:endParaRPr lang="en-US"/>
           </a:p>
         </p:txBody>
       </p:sp>
@@ -2496,7 +2493,7 @@
           <a:p>
             <a:pPr lvl="0"/>
             <a:r>
-              <a:rPr lang="en-US" smtClean="0"/>
+              <a:rPr lang="en-US"/>
               <a:t>Click to edit Master text styles</a:t>
             </a:r>
           </a:p>
@@ -2519,7 +2516,7 @@
           <a:p>
             <a:fld id="{5BCAD085-E8A6-8845-BD4E-CB4CCA059FC4}" type="datetimeFigureOut">
               <a:rPr lang="en-US" smtClean="0"/>
-              <a:t>1/27/13</a:t>
+              <a:t>5/7/2026</a:t>
             </a:fld>
             <a:endParaRPr lang="en-US"/>
           </a:p>
@@ -2628,10 +2625,9 @@
           <a:lstStyle/>
           <a:p>
             <a:r>
-              <a:rPr lang="en-US" smtClean="0"/>
+              <a:rPr lang="en-US"/>
               <a:t>Click to edit Master title style</a:t>
             </a:r>
-            <a:endParaRPr lang="en-US"/>
           </a:p>
         </p:txBody>
       </p:sp>
@@ -2662,38 +2658,37 @@
           <a:p>
             <a:pPr lvl="0"/>
             <a:r>
-              <a:rPr lang="en-US" smtClean="0"/>
+              <a:rPr lang="en-US"/>
               <a:t>Click to edit Master text styles</a:t>
             </a:r>
           </a:p>
           <a:p>
             <a:pPr lvl="1"/>
             <a:r>
-              <a:rPr lang="en-US" smtClean="0"/>
+              <a:rPr lang="en-US"/>
               <a:t>Second level</a:t>
             </a:r>
           </a:p>
           <a:p>
             <a:pPr lvl="2"/>
             <a:r>
-              <a:rPr lang="en-US" smtClean="0"/>
+              <a:rPr lang="en-US"/>
               <a:t>Third level</a:t>
             </a:r>
           </a:p>
           <a:p>
             <a:pPr lvl="3"/>
             <a:r>
-              <a:rPr lang="en-US" smtClean="0"/>
+              <a:rPr lang="en-US"/>
               <a:t>Fourth level</a:t>
             </a:r>
           </a:p>
           <a:p>
             <a:pPr lvl="4"/>
             <a:r>
-              <a:rPr lang="en-US" smtClean="0"/>
+              <a:rPr lang="en-US"/>
               <a:t>Fifth level</a:t>
             </a:r>
-            <a:endParaRPr lang="en-US"/>
           </a:p>
         </p:txBody>
       </p:sp>
@@ -2732,7 +2727,7 @@
           <a:p>
             <a:fld id="{5BCAD085-E8A6-8845-BD4E-CB4CCA059FC4}" type="datetimeFigureOut">
               <a:rPr lang="en-US" smtClean="0"/>
-              <a:t>1/27/13</a:t>
+              <a:t>5/7/2026</a:t>
             </a:fld>
             <a:endParaRPr lang="en-US"/>
           </a:p>
@@ -3091,7 +3086,7 @@
 </file>
 
 <file path=ppt/slides/slide1.xml><?xml version="1.0" encoding="utf-8"?>
-<p:sld xmlns:a="http://schemas.openxmlformats.org/drawingml/2006/main" xmlns:p="http://schemas.openxmlformats.org/presentationml/2006/main" xmlns:r="http://schemas.openxmlformats.org/officeDocument/2006/relationships">
+<p:sld xmlns:a="http://schemas.openxmlformats.org/drawingml/2006/main" xmlns:r="http://schemas.openxmlformats.org/officeDocument/2006/relationships" xmlns:p="http://schemas.openxmlformats.org/presentationml/2006/main">
   <p:cSld>
     <p:spTree>
       <p:nvGrpSpPr>
@@ -3099,7 +3094,14 @@
         <p:cNvGrpSpPr/>
         <p:nvPr/>
       </p:nvGrpSpPr>
-      <p:grpSpPr/>
+      <p:grpSpPr>
+        <a:xfrm>
+          <a:off x="0" y="0"/>
+          <a:ext cx="0" cy="0"/>
+          <a:chOff x="0" y="0"/>
+          <a:chExt cx="0" cy="0"/>
+        </a:xfrm>
+      </p:grpSpPr>
       <p:sp>
         <p:nvSpPr>
           <p:cNvPr id="2" name="Title 1"/>
@@ -3137,12 +3139,14 @@
           <a:lstStyle/>
           <a:p>
             <a:r>
+              <a:rPr dirty="0"/>
               <a:t>Variables and Datatypes</a:t>
             </a:r>
           </a:p>
           <a:p>
             <a:r>
-              <a:t>Training Session</a:t>
+              <a:rPr dirty="0"/>
+              <a:t>Training</a:t>
             </a:r>
           </a:p>
         </p:txBody>
@@ -3156,7 +3160,7 @@
 </file>
 
 <file path=ppt/slides/slide10.xml><?xml version="1.0" encoding="utf-8"?>
-<p:sld xmlns:a="http://schemas.openxmlformats.org/drawingml/2006/main" xmlns:p="http://schemas.openxmlformats.org/presentationml/2006/main" xmlns:r="http://schemas.openxmlformats.org/officeDocument/2006/relationships">
+<p:sld xmlns:a="http://schemas.openxmlformats.org/drawingml/2006/main" xmlns:r="http://schemas.openxmlformats.org/officeDocument/2006/relationships" xmlns:p="http://schemas.openxmlformats.org/presentationml/2006/main">
   <p:cSld>
     <p:spTree>
       <p:nvGrpSpPr>
@@ -3164,7 +3168,14 @@
         <p:cNvGrpSpPr/>
         <p:nvPr/>
       </p:nvGrpSpPr>
-      <p:grpSpPr/>
+      <p:grpSpPr>
+        <a:xfrm>
+          <a:off x="0" y="0"/>
+          <a:ext cx="0" cy="0"/>
+          <a:chOff x="0" y="0"/>
+          <a:chExt cx="0" cy="0"/>
+        </a:xfrm>
+      </p:grpSpPr>
       <p:sp>
         <p:nvSpPr>
           <p:cNvPr id="2" name="Title 1"/>
@@ -3201,43 +3212,36 @@
           <a:bodyPr/>
           <a:lstStyle/>
           <a:p>
-            <a:pPr/>
             <a:r>
               <a:t>NO-UNDO – prevents rollback tracking</a:t>
             </a:r>
           </a:p>
           <a:p>
-            <a:pPr/>
             <a:r>
               <a:t>LIKE – inherit type from another variable</a:t>
             </a:r>
           </a:p>
           <a:p>
-            <a:pPr/>
             <a:r>
               <a:t>INITIAL – assign default value</a:t>
             </a:r>
           </a:p>
           <a:p>
-            <a:pPr/>
             <a:r>
               <a:t>FORMAT – control output display</a:t>
             </a:r>
           </a:p>
           <a:p>
-            <a:pPr/>
             <a:r>
               <a:t>LABEL – user friendly name</a:t>
             </a:r>
           </a:p>
           <a:p>
-            <a:pPr/>
             <a:r>
               <a:t>EXTENT – fixed-size array</a:t>
             </a:r>
           </a:p>
           <a:p>
-            <a:pPr/>
             <a:r>
               <a:t>SHARED – share across procedures</a:t>
             </a:r>
@@ -3253,7 +3257,7 @@
 </file>
 
 <file path=ppt/slides/slide11.xml><?xml version="1.0" encoding="utf-8"?>
-<p:sld xmlns:a="http://schemas.openxmlformats.org/drawingml/2006/main" xmlns:p="http://schemas.openxmlformats.org/presentationml/2006/main" xmlns:r="http://schemas.openxmlformats.org/officeDocument/2006/relationships">
+<p:sld xmlns:a="http://schemas.openxmlformats.org/drawingml/2006/main" xmlns:r="http://schemas.openxmlformats.org/officeDocument/2006/relationships" xmlns:p="http://schemas.openxmlformats.org/presentationml/2006/main">
   <p:cSld>
     <p:spTree>
       <p:nvGrpSpPr>
@@ -3261,7 +3265,14 @@
         <p:cNvGrpSpPr/>
         <p:nvPr/>
       </p:nvGrpSpPr>
-      <p:grpSpPr/>
+      <p:grpSpPr>
+        <a:xfrm>
+          <a:off x="0" y="0"/>
+          <a:ext cx="0" cy="0"/>
+          <a:chOff x="0" y="0"/>
+          <a:chExt cx="0" cy="0"/>
+        </a:xfrm>
+      </p:grpSpPr>
       <p:sp>
         <p:nvSpPr>
           <p:cNvPr id="2" name="Title 1"/>
@@ -3298,19 +3309,16 @@
           <a:bodyPr/>
           <a:lstStyle/>
           <a:p>
-            <a:pPr/>
             <a:r>
               <a:t>Local variables – current procedure</a:t>
             </a:r>
           </a:p>
           <a:p>
-            <a:pPr/>
             <a:r>
               <a:t>Parameters – procedure signatures</a:t>
             </a:r>
           </a:p>
           <a:p>
-            <a:pPr/>
             <a:r>
               <a:t>Shared variables – accessible across procedures</a:t>
             </a:r>
@@ -3326,7 +3334,7 @@
 </file>
 
 <file path=ppt/slides/slide12.xml><?xml version="1.0" encoding="utf-8"?>
-<p:sld xmlns:a="http://schemas.openxmlformats.org/drawingml/2006/main" xmlns:p="http://schemas.openxmlformats.org/presentationml/2006/main" xmlns:r="http://schemas.openxmlformats.org/officeDocument/2006/relationships">
+<p:sld xmlns:a="http://schemas.openxmlformats.org/drawingml/2006/main" xmlns:r="http://schemas.openxmlformats.org/officeDocument/2006/relationships" xmlns:p="http://schemas.openxmlformats.org/presentationml/2006/main">
   <p:cSld>
     <p:spTree>
       <p:nvGrpSpPr>
@@ -3334,7 +3342,14 @@
         <p:cNvGrpSpPr/>
         <p:nvPr/>
       </p:nvGrpSpPr>
-      <p:grpSpPr/>
+      <p:grpSpPr>
+        <a:xfrm>
+          <a:off x="0" y="0"/>
+          <a:ext cx="0" cy="0"/>
+          <a:chOff x="0" y="0"/>
+          <a:chExt cx="0" cy="0"/>
+        </a:xfrm>
+      </p:grpSpPr>
       <p:sp>
         <p:nvSpPr>
           <p:cNvPr id="2" name="Title 1"/>
@@ -3371,19 +3386,16 @@
           <a:bodyPr/>
           <a:lstStyle/>
           <a:p>
-            <a:pPr/>
             <a:r>
               <a:t>DEFINE VARIABLE cFirstName AS CHARACTER NO-UNDO LABEL "First Name".</a:t>
             </a:r>
           </a:p>
           <a:p>
-            <a:pPr/>
             <a:r>
               <a:t>DEFINE VARIABLE nQty AS INTEGER NO-UNDO INITIAL 1.</a:t>
             </a:r>
           </a:p>
           <a:p>
-            <a:pPr/>
             <a:r>
               <a:t>DEFINE VARIABLE dPrice AS DECIMAL NO-UNDO FORMAT "&gt;,&gt;9.99".</a:t>
             </a:r>
@@ -3399,7 +3411,7 @@
 </file>
 
 <file path=ppt/slides/slide13.xml><?xml version="1.0" encoding="utf-8"?>
-<p:sld xmlns:a="http://schemas.openxmlformats.org/drawingml/2006/main" xmlns:p="http://schemas.openxmlformats.org/presentationml/2006/main" xmlns:r="http://schemas.openxmlformats.org/officeDocument/2006/relationships">
+<p:sld xmlns:a="http://schemas.openxmlformats.org/drawingml/2006/main" xmlns:r="http://schemas.openxmlformats.org/officeDocument/2006/relationships" xmlns:p="http://schemas.openxmlformats.org/presentationml/2006/main">
   <p:cSld>
     <p:spTree>
       <p:nvGrpSpPr>
@@ -3407,7 +3419,14 @@
         <p:cNvGrpSpPr/>
         <p:nvPr/>
       </p:nvGrpSpPr>
-      <p:grpSpPr/>
+      <p:grpSpPr>
+        <a:xfrm>
+          <a:off x="0" y="0"/>
+          <a:ext cx="0" cy="0"/>
+          <a:chOff x="0" y="0"/>
+          <a:chExt cx="0" cy="0"/>
+        </a:xfrm>
+      </p:grpSpPr>
       <p:sp>
         <p:nvSpPr>
           <p:cNvPr id="2" name="Title 1"/>
@@ -3444,31 +3463,26 @@
           <a:bodyPr/>
           <a:lstStyle/>
           <a:p>
-            <a:pPr/>
             <a:r>
               <a:t>Prefer NO-UNDO for local variables.</a:t>
             </a:r>
           </a:p>
           <a:p>
-            <a:pPr/>
             <a:r>
               <a:t>Use LIKE for matching datatypes.</a:t>
             </a:r>
           </a:p>
           <a:p>
-            <a:pPr/>
             <a:r>
               <a:t>Choose meaningful variable names.</a:t>
             </a:r>
           </a:p>
           <a:p>
-            <a:pPr/>
             <a:r>
               <a:t>Use LABEL for clarity.</a:t>
             </a:r>
           </a:p>
           <a:p>
-            <a:pPr/>
             <a:r>
               <a:t>Use EXTENT only for fixed-size arrays.</a:t>
             </a:r>
@@ -3484,7 +3498,7 @@
 </file>
 
 <file path=ppt/slides/slide2.xml><?xml version="1.0" encoding="utf-8"?>
-<p:sld xmlns:a="http://schemas.openxmlformats.org/drawingml/2006/main" xmlns:p="http://schemas.openxmlformats.org/presentationml/2006/main" xmlns:r="http://schemas.openxmlformats.org/officeDocument/2006/relationships">
+<p:sld xmlns:a="http://schemas.openxmlformats.org/drawingml/2006/main" xmlns:r="http://schemas.openxmlformats.org/officeDocument/2006/relationships" xmlns:p="http://schemas.openxmlformats.org/presentationml/2006/main">
   <p:cSld>
     <p:spTree>
       <p:nvGrpSpPr>
@@ -3492,7 +3506,14 @@
         <p:cNvGrpSpPr/>
         <p:nvPr/>
       </p:nvGrpSpPr>
-      <p:grpSpPr/>
+      <p:grpSpPr>
+        <a:xfrm>
+          <a:off x="0" y="0"/>
+          <a:ext cx="0" cy="0"/>
+          <a:chOff x="0" y="0"/>
+          <a:chExt cx="0" cy="0"/>
+        </a:xfrm>
+      </p:grpSpPr>
       <p:sp>
         <p:nvSpPr>
           <p:cNvPr id="2" name="Title 1"/>
@@ -3529,25 +3550,21 @@
           <a:bodyPr/>
           <a:lstStyle/>
           <a:p>
-            <a:pPr/>
             <a:r>
               <a:t>Progress 4GL is a fourth-generation language (4GL).</a:t>
             </a:r>
           </a:p>
           <a:p>
-            <a:pPr/>
             <a:r>
               <a:t>Designed to simplify business application development.</a:t>
             </a:r>
           </a:p>
           <a:p>
-            <a:pPr/>
             <a:r>
               <a:t>3GLs require more explicit coding and control flow.</a:t>
             </a:r>
           </a:p>
           <a:p>
-            <a:pPr/>
             <a:r>
               <a:t>Examples of 3GLs: C, Java, Python, COBOL, Pascal.</a:t>
             </a:r>
@@ -3563,7 +3580,7 @@
 </file>
 
 <file path=ppt/slides/slide3.xml><?xml version="1.0" encoding="utf-8"?>
-<p:sld xmlns:a="http://schemas.openxmlformats.org/drawingml/2006/main" xmlns:p="http://schemas.openxmlformats.org/presentationml/2006/main" xmlns:r="http://schemas.openxmlformats.org/officeDocument/2006/relationships">
+<p:sld xmlns:a="http://schemas.openxmlformats.org/drawingml/2006/main" xmlns:r="http://schemas.openxmlformats.org/officeDocument/2006/relationships" xmlns:p="http://schemas.openxmlformats.org/presentationml/2006/main">
   <p:cSld>
     <p:spTree>
       <p:nvGrpSpPr>
@@ -3571,7 +3588,14 @@
         <p:cNvGrpSpPr/>
         <p:nvPr/>
       </p:nvGrpSpPr>
-      <p:grpSpPr/>
+      <p:grpSpPr>
+        <a:xfrm>
+          <a:off x="0" y="0"/>
+          <a:ext cx="0" cy="0"/>
+          <a:chOff x="0" y="0"/>
+          <a:chExt cx="0" cy="0"/>
+        </a:xfrm>
+      </p:grpSpPr>
       <p:sp>
         <p:nvSpPr>
           <p:cNvPr id="2" name="Title 1"/>
@@ -3608,25 +3632,21 @@
           <a:bodyPr/>
           <a:lstStyle/>
           <a:p>
-            <a:pPr/>
             <a:r>
               <a:t>Developed by Progress Software Corporation in 1983.</a:t>
             </a:r>
           </a:p>
           <a:p>
-            <a:pPr/>
             <a:r>
               <a:t>Designed for enterprise application development.</a:t>
             </a:r>
           </a:p>
           <a:p>
-            <a:pPr/>
             <a:r>
               <a:t>Later renamed OpenEdge ABL.</a:t>
             </a:r>
           </a:p>
           <a:p>
-            <a:pPr/>
             <a:r>
               <a:t>Strengths: rapid development, integrated DB access, business logic support.</a:t>
             </a:r>
@@ -3642,7 +3662,7 @@
 </file>
 
 <file path=ppt/slides/slide4.xml><?xml version="1.0" encoding="utf-8"?>
-<p:sld xmlns:a="http://schemas.openxmlformats.org/drawingml/2006/main" xmlns:p="http://schemas.openxmlformats.org/presentationml/2006/main" xmlns:r="http://schemas.openxmlformats.org/officeDocument/2006/relationships">
+<p:sld xmlns:a="http://schemas.openxmlformats.org/drawingml/2006/main" xmlns:r="http://schemas.openxmlformats.org/officeDocument/2006/relationships" xmlns:p="http://schemas.openxmlformats.org/presentationml/2006/main">
   <p:cSld>
     <p:spTree>
       <p:nvGrpSpPr>
@@ -3650,7 +3670,14 @@
         <p:cNvGrpSpPr/>
         <p:nvPr/>
       </p:nvGrpSpPr>
-      <p:grpSpPr/>
+      <p:grpSpPr>
+        <a:xfrm>
+          <a:off x="0" y="0"/>
+          <a:ext cx="0" cy="0"/>
+          <a:chOff x="0" y="0"/>
+          <a:chExt cx="0" cy="0"/>
+        </a:xfrm>
+      </p:grpSpPr>
       <p:sp>
         <p:nvSpPr>
           <p:cNvPr id="2" name="Title 1"/>
@@ -3687,7 +3714,6 @@
           <a:bodyPr/>
           <a:lstStyle/>
           <a:p>
-            <a:pPr/>
             <a:r>
               <a:t>MESSAGE "Starting Progress 4GL variable and datatype basics" VIEW-AS ALERT-BOX.</a:t>
             </a:r>
@@ -3703,7 +3729,7 @@
 </file>
 
 <file path=ppt/slides/slide5.xml><?xml version="1.0" encoding="utf-8"?>
-<p:sld xmlns:a="http://schemas.openxmlformats.org/drawingml/2006/main" xmlns:p="http://schemas.openxmlformats.org/presentationml/2006/main" xmlns:r="http://schemas.openxmlformats.org/officeDocument/2006/relationships">
+<p:sld xmlns:a="http://schemas.openxmlformats.org/drawingml/2006/main" xmlns:r="http://schemas.openxmlformats.org/officeDocument/2006/relationships" xmlns:p="http://schemas.openxmlformats.org/presentationml/2006/main">
   <p:cSld>
     <p:spTree>
       <p:nvGrpSpPr>
@@ -3711,7 +3737,14 @@
         <p:cNvGrpSpPr/>
         <p:nvPr/>
       </p:nvGrpSpPr>
-      <p:grpSpPr/>
+      <p:grpSpPr>
+        <a:xfrm>
+          <a:off x="0" y="0"/>
+          <a:ext cx="0" cy="0"/>
+          <a:chOff x="0" y="0"/>
+          <a:chExt cx="0" cy="0"/>
+        </a:xfrm>
+      </p:grpSpPr>
       <p:sp>
         <p:nvSpPr>
           <p:cNvPr id="2" name="Title 1"/>
@@ -3748,25 +3781,21 @@
           <a:bodyPr/>
           <a:lstStyle/>
           <a:p>
-            <a:pPr/>
             <a:r>
               <a:t>DEFINE VARIABLE i AS INTEGER NO-UNDO.</a:t>
             </a:r>
           </a:p>
           <a:p>
-            <a:pPr/>
             <a:r>
               <a:t>DEFINE VARIABLE cName AS CHARACTER NO-UNDO.</a:t>
             </a:r>
           </a:p>
           <a:p>
-            <a:pPr/>
             <a:r>
               <a:t>DEFINE VARIABLE dAmount AS DECIMAL NO-UNDO.</a:t>
             </a:r>
           </a:p>
           <a:p>
-            <a:pPr/>
             <a:r>
               <a:t>DEFINE VARIABLE lActive AS LOGICAL NO-UNDO.</a:t>
             </a:r>
@@ -3782,7 +3811,7 @@
 </file>
 
 <file path=ppt/slides/slide6.xml><?xml version="1.0" encoding="utf-8"?>
-<p:sld xmlns:a="http://schemas.openxmlformats.org/drawingml/2006/main" xmlns:p="http://schemas.openxmlformats.org/presentationml/2006/main" xmlns:r="http://schemas.openxmlformats.org/officeDocument/2006/relationships">
+<p:sld xmlns:a="http://schemas.openxmlformats.org/drawingml/2006/main" xmlns:r="http://schemas.openxmlformats.org/officeDocument/2006/relationships" xmlns:p="http://schemas.openxmlformats.org/presentationml/2006/main">
   <p:cSld>
     <p:spTree>
       <p:nvGrpSpPr>
@@ -3790,7 +3819,14 @@
         <p:cNvGrpSpPr/>
         <p:nvPr/>
       </p:nvGrpSpPr>
-      <p:grpSpPr/>
+      <p:grpSpPr>
+        <a:xfrm>
+          <a:off x="0" y="0"/>
+          <a:ext cx="0" cy="0"/>
+          <a:chOff x="0" y="0"/>
+          <a:chExt cx="0" cy="0"/>
+        </a:xfrm>
+      </p:grpSpPr>
       <p:sp>
         <p:nvSpPr>
           <p:cNvPr id="2" name="Title 1"/>
@@ -3812,58 +3848,1473 @@
           </a:p>
         </p:txBody>
       </p:sp>
-      <p:sp>
-        <p:nvSpPr>
-          <p:cNvPr id="3" name="Content Placeholder 2"/>
-          <p:cNvSpPr>
-            <a:spLocks noGrp="1"/>
-          </p:cNvSpPr>
-          <p:nvPr>
-            <p:ph idx="1"/>
-          </p:nvPr>
-        </p:nvSpPr>
-        <p:spPr/>
-        <p:txBody>
-          <a:bodyPr/>
-          <a:lstStyle/>
-          <a:p>
-            <a:pPr/>
-            <a:r>
-              <a:t>CHARACTER – text/string</a:t>
-            </a:r>
-          </a:p>
-          <a:p>
-            <a:pPr/>
-            <a:r>
-              <a:t>INTEGER / INT64 – numbers</a:t>
-            </a:r>
-          </a:p>
-          <a:p>
-            <a:pPr/>
-            <a:r>
-              <a:t>DECIMAL – decimal numbers</a:t>
-            </a:r>
-          </a:p>
-          <a:p>
-            <a:pPr/>
-            <a:r>
-              <a:t>LOGICAL – true/false</a:t>
-            </a:r>
-          </a:p>
-          <a:p>
-            <a:pPr/>
-            <a:r>
-              <a:t>DATE / DATETIME / DATETIME-TZ</a:t>
-            </a:r>
-          </a:p>
-          <a:p>
-            <a:pPr/>
-            <a:r>
-              <a:t>LONGCHAR, ROWID, HANDLE, RAW, BLOB, CLOB, CLASS</a:t>
-            </a:r>
-          </a:p>
-        </p:txBody>
-      </p:sp>
+      <p:graphicFrame>
+        <p:nvGraphicFramePr>
+          <p:cNvPr id="7" name="Table 6">
+            <a:extLst>
+              <a:ext uri="{FF2B5EF4-FFF2-40B4-BE49-F238E27FC236}">
+                <a16:creationId xmlns:a16="http://schemas.microsoft.com/office/drawing/2014/main" id="{FD5836D5-8A86-1F5D-5DBF-9D72FBA18E1A}"/>
+              </a:ext>
+            </a:extLst>
+          </p:cNvPr>
+          <p:cNvGraphicFramePr>
+            <a:graphicFrameLocks noGrp="1"/>
+          </p:cNvGraphicFramePr>
+          <p:nvPr>
+            <p:extLst>
+              <p:ext uri="{D42A27DB-BD31-4B8C-83A1-F6EECF244321}">
+                <p14:modId xmlns:p14="http://schemas.microsoft.com/office/powerpoint/2010/main" val="372192025"/>
+              </p:ext>
+            </p:extLst>
+          </p:nvPr>
+        </p:nvGraphicFramePr>
+        <p:xfrm>
+          <a:off x="540774" y="1337187"/>
+          <a:ext cx="8146024" cy="5371985"/>
+        </p:xfrm>
+        <a:graphic>
+          <a:graphicData uri="http://schemas.openxmlformats.org/drawingml/2006/table">
+            <a:tbl>
+              <a:tblPr/>
+              <a:tblGrid>
+                <a:gridCol w="4073012">
+                  <a:extLst>
+                    <a:ext uri="{9D8B030D-6E8A-4147-A177-3AD203B41FA5}">
+                      <a16:colId xmlns:a16="http://schemas.microsoft.com/office/drawing/2014/main" val="3442658089"/>
+                    </a:ext>
+                  </a:extLst>
+                </a:gridCol>
+                <a:gridCol w="4073012">
+                  <a:extLst>
+                    <a:ext uri="{9D8B030D-6E8A-4147-A177-3AD203B41FA5}">
+                      <a16:colId xmlns:a16="http://schemas.microsoft.com/office/drawing/2014/main" val="2063488267"/>
+                    </a:ext>
+                  </a:extLst>
+                </a:gridCol>
+              </a:tblGrid>
+              <a:tr h="260567">
+                <a:tc>
+                  <a:txBody>
+                    <a:bodyPr/>
+                    <a:lstStyle/>
+                    <a:p>
+                      <a:pPr algn="l" fontAlgn="t">
+                        <a:lnSpc>
+                          <a:spcPts val="1800"/>
+                        </a:lnSpc>
+                        <a:buNone/>
+                      </a:pPr>
+                      <a:r>
+                        <a:rPr lang="en-IN" sz="1100">
+                          <a:effectLst/>
+                        </a:rPr>
+                        <a:t>Data type</a:t>
+                      </a:r>
+                    </a:p>
+                  </a:txBody>
+                  <a:tcPr marL="37232" marR="37232" marT="37232" marB="37232">
+                    <a:lnL w="7620" cap="flat" cmpd="sng" algn="ctr">
+                      <a:solidFill>
+                        <a:srgbClr val="BEBEBE"/>
+                      </a:solidFill>
+                      <a:prstDash val="solid"/>
+                      <a:round/>
+                      <a:headEnd type="none" w="med" len="med"/>
+                      <a:tailEnd type="none" w="med" len="med"/>
+                    </a:lnL>
+                    <a:lnR w="7620" cap="flat" cmpd="sng" algn="ctr">
+                      <a:solidFill>
+                        <a:srgbClr val="BEBEBE"/>
+                      </a:solidFill>
+                      <a:prstDash val="solid"/>
+                      <a:round/>
+                      <a:headEnd type="none" w="med" len="med"/>
+                      <a:tailEnd type="none" w="med" len="med"/>
+                    </a:lnR>
+                    <a:lnT w="7620" cap="flat" cmpd="sng" algn="ctr">
+                      <a:solidFill>
+                        <a:srgbClr val="BEBEBE"/>
+                      </a:solidFill>
+                      <a:prstDash val="solid"/>
+                      <a:round/>
+                      <a:headEnd type="none" w="med" len="med"/>
+                      <a:tailEnd type="none" w="med" len="med"/>
+                    </a:lnT>
+                    <a:lnB w="7620" cap="flat" cmpd="sng" algn="ctr">
+                      <a:solidFill>
+                        <a:srgbClr val="BEBEBE"/>
+                      </a:solidFill>
+                      <a:prstDash val="solid"/>
+                      <a:round/>
+                      <a:headEnd type="none" w="med" len="med"/>
+                      <a:tailEnd type="none" w="med" len="med"/>
+                    </a:lnB>
+                    <a:solidFill>
+                      <a:srgbClr val="E9EEEE"/>
+                    </a:solidFill>
+                  </a:tcPr>
+                </a:tc>
+                <a:tc>
+                  <a:txBody>
+                    <a:bodyPr/>
+                    <a:lstStyle/>
+                    <a:p>
+                      <a:pPr algn="l" fontAlgn="t">
+                        <a:lnSpc>
+                          <a:spcPts val="1800"/>
+                        </a:lnSpc>
+                        <a:buNone/>
+                      </a:pPr>
+                      <a:r>
+                        <a:rPr lang="en-IN" sz="1100">
+                          <a:effectLst/>
+                        </a:rPr>
+                        <a:t>Description</a:t>
+                      </a:r>
+                    </a:p>
+                  </a:txBody>
+                  <a:tcPr marL="37232" marR="37232" marT="37232" marB="37232">
+                    <a:lnL w="7620" cap="flat" cmpd="sng" algn="ctr">
+                      <a:solidFill>
+                        <a:srgbClr val="BEBEBE"/>
+                      </a:solidFill>
+                      <a:prstDash val="solid"/>
+                      <a:round/>
+                      <a:headEnd type="none" w="med" len="med"/>
+                      <a:tailEnd type="none" w="med" len="med"/>
+                    </a:lnL>
+                    <a:lnR w="7620" cap="flat" cmpd="sng" algn="ctr">
+                      <a:solidFill>
+                        <a:srgbClr val="BEBEBE"/>
+                      </a:solidFill>
+                      <a:prstDash val="solid"/>
+                      <a:round/>
+                      <a:headEnd type="none" w="med" len="med"/>
+                      <a:tailEnd type="none" w="med" len="med"/>
+                    </a:lnR>
+                    <a:lnT w="7620" cap="flat" cmpd="sng" algn="ctr">
+                      <a:solidFill>
+                        <a:srgbClr val="BEBEBE"/>
+                      </a:solidFill>
+                      <a:prstDash val="solid"/>
+                      <a:round/>
+                      <a:headEnd type="none" w="med" len="med"/>
+                      <a:tailEnd type="none" w="med" len="med"/>
+                    </a:lnT>
+                    <a:lnB w="7620" cap="flat" cmpd="sng" algn="ctr">
+                      <a:solidFill>
+                        <a:srgbClr val="BEBEBE"/>
+                      </a:solidFill>
+                      <a:prstDash val="solid"/>
+                      <a:round/>
+                      <a:headEnd type="none" w="med" len="med"/>
+                      <a:tailEnd type="none" w="med" len="med"/>
+                    </a:lnB>
+                    <a:solidFill>
+                      <a:srgbClr val="E9EEEE"/>
+                    </a:solidFill>
+                  </a:tcPr>
+                </a:tc>
+                <a:extLst>
+                  <a:ext uri="{0D108BD9-81ED-4DB2-BD59-A6C34878D82A}">
+                    <a16:rowId xmlns:a16="http://schemas.microsoft.com/office/drawing/2014/main" val="1242661356"/>
+                  </a:ext>
+                </a:extLst>
+              </a:tr>
+              <a:tr h="732551">
+                <a:tc>
+                  <a:txBody>
+                    <a:bodyPr/>
+                    <a:lstStyle/>
+                    <a:p>
+                      <a:pPr algn="l" fontAlgn="t">
+                        <a:lnSpc>
+                          <a:spcPts val="1800"/>
+                        </a:lnSpc>
+                        <a:buNone/>
+                      </a:pPr>
+                      <a:r>
+                        <a:rPr lang="en-IN" sz="1100" dirty="0">
+                          <a:effectLst/>
+                        </a:rPr>
+                        <a:t>CHARACTER</a:t>
+                      </a:r>
+                    </a:p>
+                  </a:txBody>
+                  <a:tcPr marL="37232" marR="37232" marT="37232" marB="37232">
+                    <a:lnL w="7620" cap="flat" cmpd="sng" algn="ctr">
+                      <a:solidFill>
+                        <a:srgbClr val="BEBEBE"/>
+                      </a:solidFill>
+                      <a:prstDash val="solid"/>
+                      <a:round/>
+                      <a:headEnd type="none" w="med" len="med"/>
+                      <a:tailEnd type="none" w="med" len="med"/>
+                    </a:lnL>
+                    <a:lnR w="7620" cap="flat" cmpd="sng" algn="ctr">
+                      <a:solidFill>
+                        <a:srgbClr val="BEBEBE"/>
+                      </a:solidFill>
+                      <a:prstDash val="solid"/>
+                      <a:round/>
+                      <a:headEnd type="none" w="med" len="med"/>
+                      <a:tailEnd type="none" w="med" len="med"/>
+                    </a:lnR>
+                    <a:lnT w="7620" cap="flat" cmpd="sng" algn="ctr">
+                      <a:solidFill>
+                        <a:srgbClr val="BEBEBE"/>
+                      </a:solidFill>
+                      <a:prstDash val="solid"/>
+                      <a:round/>
+                      <a:headEnd type="none" w="med" len="med"/>
+                      <a:tailEnd type="none" w="med" len="med"/>
+                    </a:lnT>
+                    <a:lnB w="7620" cap="flat" cmpd="sng" algn="ctr">
+                      <a:solidFill>
+                        <a:srgbClr val="BEBEBE"/>
+                      </a:solidFill>
+                      <a:prstDash val="solid"/>
+                      <a:round/>
+                      <a:headEnd type="none" w="med" len="med"/>
+                      <a:tailEnd type="none" w="med" len="med"/>
+                    </a:lnB>
+                    <a:solidFill>
+                      <a:srgbClr val="FFFFFF"/>
+                    </a:solidFill>
+                  </a:tcPr>
+                </a:tc>
+                <a:tc>
+                  <a:txBody>
+                    <a:bodyPr/>
+                    <a:lstStyle/>
+                    <a:p>
+                      <a:pPr algn="l" fontAlgn="t">
+                        <a:lnSpc>
+                          <a:spcPts val="1800"/>
+                        </a:lnSpc>
+                        <a:buNone/>
+                      </a:pPr>
+                      <a:r>
+                        <a:rPr lang="en-US" sz="1100">
+                          <a:effectLst/>
+                        </a:rPr>
+                        <a:t>Specifies data (letters, numbers, and special characters) as a character string. It can store up to 32,000 characters.</a:t>
+                      </a:r>
+                    </a:p>
+                  </a:txBody>
+                  <a:tcPr marL="37232" marR="37232" marT="37232" marB="37232">
+                    <a:lnL w="7620" cap="flat" cmpd="sng" algn="ctr">
+                      <a:solidFill>
+                        <a:srgbClr val="BEBEBE"/>
+                      </a:solidFill>
+                      <a:prstDash val="solid"/>
+                      <a:round/>
+                      <a:headEnd type="none" w="med" len="med"/>
+                      <a:tailEnd type="none" w="med" len="med"/>
+                    </a:lnL>
+                    <a:lnR w="7620" cap="flat" cmpd="sng" algn="ctr">
+                      <a:solidFill>
+                        <a:srgbClr val="BEBEBE"/>
+                      </a:solidFill>
+                      <a:prstDash val="solid"/>
+                      <a:round/>
+                      <a:headEnd type="none" w="med" len="med"/>
+                      <a:tailEnd type="none" w="med" len="med"/>
+                    </a:lnR>
+                    <a:lnT w="7620" cap="flat" cmpd="sng" algn="ctr">
+                      <a:solidFill>
+                        <a:srgbClr val="BEBEBE"/>
+                      </a:solidFill>
+                      <a:prstDash val="solid"/>
+                      <a:round/>
+                      <a:headEnd type="none" w="med" len="med"/>
+                      <a:tailEnd type="none" w="med" len="med"/>
+                    </a:lnT>
+                    <a:lnB w="7620" cap="flat" cmpd="sng" algn="ctr">
+                      <a:solidFill>
+                        <a:srgbClr val="BEBEBE"/>
+                      </a:solidFill>
+                      <a:prstDash val="solid"/>
+                      <a:round/>
+                      <a:headEnd type="none" w="med" len="med"/>
+                      <a:tailEnd type="none" w="med" len="med"/>
+                    </a:lnB>
+                    <a:solidFill>
+                      <a:srgbClr val="FFFFFF"/>
+                    </a:solidFill>
+                  </a:tcPr>
+                </a:tc>
+                <a:extLst>
+                  <a:ext uri="{0D108BD9-81ED-4DB2-BD59-A6C34878D82A}">
+                    <a16:rowId xmlns:a16="http://schemas.microsoft.com/office/drawing/2014/main" val="2465564414"/>
+                  </a:ext>
+                </a:extLst>
+              </a:tr>
+              <a:tr h="260567">
+                <a:tc>
+                  <a:txBody>
+                    <a:bodyPr/>
+                    <a:lstStyle/>
+                    <a:p>
+                      <a:pPr algn="l" fontAlgn="t">
+                        <a:lnSpc>
+                          <a:spcPts val="1800"/>
+                        </a:lnSpc>
+                        <a:buNone/>
+                      </a:pPr>
+                      <a:r>
+                        <a:rPr lang="en-IN" sz="1100">
+                          <a:effectLst/>
+                        </a:rPr>
+                        <a:t>DATE</a:t>
+                      </a:r>
+                    </a:p>
+                  </a:txBody>
+                  <a:tcPr marL="37232" marR="37232" marT="37232" marB="37232">
+                    <a:lnL w="7620" cap="flat" cmpd="sng" algn="ctr">
+                      <a:solidFill>
+                        <a:srgbClr val="BEBEBE"/>
+                      </a:solidFill>
+                      <a:prstDash val="solid"/>
+                      <a:round/>
+                      <a:headEnd type="none" w="med" len="med"/>
+                      <a:tailEnd type="none" w="med" len="med"/>
+                    </a:lnL>
+                    <a:lnR w="7620" cap="flat" cmpd="sng" algn="ctr">
+                      <a:solidFill>
+                        <a:srgbClr val="BEBEBE"/>
+                      </a:solidFill>
+                      <a:prstDash val="solid"/>
+                      <a:round/>
+                      <a:headEnd type="none" w="med" len="med"/>
+                      <a:tailEnd type="none" w="med" len="med"/>
+                    </a:lnR>
+                    <a:lnT w="7620" cap="flat" cmpd="sng" algn="ctr">
+                      <a:solidFill>
+                        <a:srgbClr val="BEBEBE"/>
+                      </a:solidFill>
+                      <a:prstDash val="solid"/>
+                      <a:round/>
+                      <a:headEnd type="none" w="med" len="med"/>
+                      <a:tailEnd type="none" w="med" len="med"/>
+                    </a:lnT>
+                    <a:lnB w="7620" cap="flat" cmpd="sng" algn="ctr">
+                      <a:solidFill>
+                        <a:srgbClr val="BEBEBE"/>
+                      </a:solidFill>
+                      <a:prstDash val="solid"/>
+                      <a:round/>
+                      <a:headEnd type="none" w="med" len="med"/>
+                      <a:tailEnd type="none" w="med" len="med"/>
+                    </a:lnB>
+                    <a:solidFill>
+                      <a:srgbClr val="EFEFEF"/>
+                    </a:solidFill>
+                  </a:tcPr>
+                </a:tc>
+                <a:tc>
+                  <a:txBody>
+                    <a:bodyPr/>
+                    <a:lstStyle/>
+                    <a:p>
+                      <a:pPr algn="l" fontAlgn="t">
+                        <a:lnSpc>
+                          <a:spcPts val="1800"/>
+                        </a:lnSpc>
+                        <a:buNone/>
+                      </a:pPr>
+                      <a:r>
+                        <a:rPr lang="en-IN" sz="1100">
+                          <a:effectLst/>
+                        </a:rPr>
+                        <a:t>Specifies a date value.</a:t>
+                      </a:r>
+                    </a:p>
+                  </a:txBody>
+                  <a:tcPr marL="37232" marR="37232" marT="37232" marB="37232">
+                    <a:lnL w="7620" cap="flat" cmpd="sng" algn="ctr">
+                      <a:solidFill>
+                        <a:srgbClr val="BEBEBE"/>
+                      </a:solidFill>
+                      <a:prstDash val="solid"/>
+                      <a:round/>
+                      <a:headEnd type="none" w="med" len="med"/>
+                      <a:tailEnd type="none" w="med" len="med"/>
+                    </a:lnL>
+                    <a:lnR w="7620" cap="flat" cmpd="sng" algn="ctr">
+                      <a:solidFill>
+                        <a:srgbClr val="BEBEBE"/>
+                      </a:solidFill>
+                      <a:prstDash val="solid"/>
+                      <a:round/>
+                      <a:headEnd type="none" w="med" len="med"/>
+                      <a:tailEnd type="none" w="med" len="med"/>
+                    </a:lnR>
+                    <a:lnT w="7620" cap="flat" cmpd="sng" algn="ctr">
+                      <a:solidFill>
+                        <a:srgbClr val="BEBEBE"/>
+                      </a:solidFill>
+                      <a:prstDash val="solid"/>
+                      <a:round/>
+                      <a:headEnd type="none" w="med" len="med"/>
+                      <a:tailEnd type="none" w="med" len="med"/>
+                    </a:lnT>
+                    <a:lnB w="7620" cap="flat" cmpd="sng" algn="ctr">
+                      <a:solidFill>
+                        <a:srgbClr val="BEBEBE"/>
+                      </a:solidFill>
+                      <a:prstDash val="solid"/>
+                      <a:round/>
+                      <a:headEnd type="none" w="med" len="med"/>
+                      <a:tailEnd type="none" w="med" len="med"/>
+                    </a:lnB>
+                    <a:solidFill>
+                      <a:srgbClr val="EFEFEF"/>
+                    </a:solidFill>
+                  </a:tcPr>
+                </a:tc>
+                <a:extLst>
+                  <a:ext uri="{0D108BD9-81ED-4DB2-BD59-A6C34878D82A}">
+                    <a16:rowId xmlns:a16="http://schemas.microsoft.com/office/drawing/2014/main" val="3384887918"/>
+                  </a:ext>
+                </a:extLst>
+              </a:tr>
+              <a:tr h="260567">
+                <a:tc>
+                  <a:txBody>
+                    <a:bodyPr/>
+                    <a:lstStyle/>
+                    <a:p>
+                      <a:pPr algn="l" fontAlgn="t">
+                        <a:lnSpc>
+                          <a:spcPts val="1800"/>
+                        </a:lnSpc>
+                        <a:buNone/>
+                      </a:pPr>
+                      <a:r>
+                        <a:rPr lang="en-IN" sz="1100">
+                          <a:effectLst/>
+                        </a:rPr>
+                        <a:t>DATETIME</a:t>
+                      </a:r>
+                    </a:p>
+                  </a:txBody>
+                  <a:tcPr marL="37232" marR="37232" marT="37232" marB="37232">
+                    <a:lnL w="7620" cap="flat" cmpd="sng" algn="ctr">
+                      <a:solidFill>
+                        <a:srgbClr val="BEBEBE"/>
+                      </a:solidFill>
+                      <a:prstDash val="solid"/>
+                      <a:round/>
+                      <a:headEnd type="none" w="med" len="med"/>
+                      <a:tailEnd type="none" w="med" len="med"/>
+                    </a:lnL>
+                    <a:lnR w="7620" cap="flat" cmpd="sng" algn="ctr">
+                      <a:solidFill>
+                        <a:srgbClr val="BEBEBE"/>
+                      </a:solidFill>
+                      <a:prstDash val="solid"/>
+                      <a:round/>
+                      <a:headEnd type="none" w="med" len="med"/>
+                      <a:tailEnd type="none" w="med" len="med"/>
+                    </a:lnR>
+                    <a:lnT w="7620" cap="flat" cmpd="sng" algn="ctr">
+                      <a:solidFill>
+                        <a:srgbClr val="BEBEBE"/>
+                      </a:solidFill>
+                      <a:prstDash val="solid"/>
+                      <a:round/>
+                      <a:headEnd type="none" w="med" len="med"/>
+                      <a:tailEnd type="none" w="med" len="med"/>
+                    </a:lnT>
+                    <a:lnB w="7620" cap="flat" cmpd="sng" algn="ctr">
+                      <a:solidFill>
+                        <a:srgbClr val="BEBEBE"/>
+                      </a:solidFill>
+                      <a:prstDash val="solid"/>
+                      <a:round/>
+                      <a:headEnd type="none" w="med" len="med"/>
+                      <a:tailEnd type="none" w="med" len="med"/>
+                    </a:lnB>
+                    <a:solidFill>
+                      <a:srgbClr val="FFFFFF"/>
+                    </a:solidFill>
+                  </a:tcPr>
+                </a:tc>
+                <a:tc>
+                  <a:txBody>
+                    <a:bodyPr/>
+                    <a:lstStyle/>
+                    <a:p>
+                      <a:pPr algn="l" fontAlgn="t">
+                        <a:lnSpc>
+                          <a:spcPts val="1800"/>
+                        </a:lnSpc>
+                        <a:buNone/>
+                      </a:pPr>
+                      <a:r>
+                        <a:rPr lang="en-US" sz="1100">
+                          <a:effectLst/>
+                        </a:rPr>
+                        <a:t>Specifies a date and time value.</a:t>
+                      </a:r>
+                    </a:p>
+                  </a:txBody>
+                  <a:tcPr marL="37232" marR="37232" marT="37232" marB="37232">
+                    <a:lnL w="7620" cap="flat" cmpd="sng" algn="ctr">
+                      <a:solidFill>
+                        <a:srgbClr val="BEBEBE"/>
+                      </a:solidFill>
+                      <a:prstDash val="solid"/>
+                      <a:round/>
+                      <a:headEnd type="none" w="med" len="med"/>
+                      <a:tailEnd type="none" w="med" len="med"/>
+                    </a:lnL>
+                    <a:lnR w="7620" cap="flat" cmpd="sng" algn="ctr">
+                      <a:solidFill>
+                        <a:srgbClr val="BEBEBE"/>
+                      </a:solidFill>
+                      <a:prstDash val="solid"/>
+                      <a:round/>
+                      <a:headEnd type="none" w="med" len="med"/>
+                      <a:tailEnd type="none" w="med" len="med"/>
+                    </a:lnR>
+                    <a:lnT w="7620" cap="flat" cmpd="sng" algn="ctr">
+                      <a:solidFill>
+                        <a:srgbClr val="BEBEBE"/>
+                      </a:solidFill>
+                      <a:prstDash val="solid"/>
+                      <a:round/>
+                      <a:headEnd type="none" w="med" len="med"/>
+                      <a:tailEnd type="none" w="med" len="med"/>
+                    </a:lnT>
+                    <a:lnB w="7620" cap="flat" cmpd="sng" algn="ctr">
+                      <a:solidFill>
+                        <a:srgbClr val="BEBEBE"/>
+                      </a:solidFill>
+                      <a:prstDash val="solid"/>
+                      <a:round/>
+                      <a:headEnd type="none" w="med" len="med"/>
+                      <a:tailEnd type="none" w="med" len="med"/>
+                    </a:lnB>
+                    <a:solidFill>
+                      <a:srgbClr val="FFFFFF"/>
+                    </a:solidFill>
+                  </a:tcPr>
+                </a:tc>
+                <a:extLst>
+                  <a:ext uri="{0D108BD9-81ED-4DB2-BD59-A6C34878D82A}">
+                    <a16:rowId xmlns:a16="http://schemas.microsoft.com/office/drawing/2014/main" val="69187017"/>
+                  </a:ext>
+                </a:extLst>
+              </a:tr>
+              <a:tr h="393857">
+                <a:tc>
+                  <a:txBody>
+                    <a:bodyPr/>
+                    <a:lstStyle/>
+                    <a:p>
+                      <a:pPr algn="l" fontAlgn="t">
+                        <a:lnSpc>
+                          <a:spcPts val="1800"/>
+                        </a:lnSpc>
+                        <a:buNone/>
+                      </a:pPr>
+                      <a:r>
+                        <a:rPr lang="en-IN" sz="1100">
+                          <a:effectLst/>
+                        </a:rPr>
+                        <a:t>DATETIME-TZ</a:t>
+                      </a:r>
+                    </a:p>
+                  </a:txBody>
+                  <a:tcPr marL="37232" marR="37232" marT="37232" marB="37232">
+                    <a:lnL w="7620" cap="flat" cmpd="sng" algn="ctr">
+                      <a:solidFill>
+                        <a:srgbClr val="BEBEBE"/>
+                      </a:solidFill>
+                      <a:prstDash val="solid"/>
+                      <a:round/>
+                      <a:headEnd type="none" w="med" len="med"/>
+                      <a:tailEnd type="none" w="med" len="med"/>
+                    </a:lnL>
+                    <a:lnR w="7620" cap="flat" cmpd="sng" algn="ctr">
+                      <a:solidFill>
+                        <a:srgbClr val="BEBEBE"/>
+                      </a:solidFill>
+                      <a:prstDash val="solid"/>
+                      <a:round/>
+                      <a:headEnd type="none" w="med" len="med"/>
+                      <a:tailEnd type="none" w="med" len="med"/>
+                    </a:lnR>
+                    <a:lnT w="7620" cap="flat" cmpd="sng" algn="ctr">
+                      <a:solidFill>
+                        <a:srgbClr val="BEBEBE"/>
+                      </a:solidFill>
+                      <a:prstDash val="solid"/>
+                      <a:round/>
+                      <a:headEnd type="none" w="med" len="med"/>
+                      <a:tailEnd type="none" w="med" len="med"/>
+                    </a:lnT>
+                    <a:lnB w="7620" cap="flat" cmpd="sng" algn="ctr">
+                      <a:solidFill>
+                        <a:srgbClr val="BEBEBE"/>
+                      </a:solidFill>
+                      <a:prstDash val="solid"/>
+                      <a:round/>
+                      <a:headEnd type="none" w="med" len="med"/>
+                      <a:tailEnd type="none" w="med" len="med"/>
+                    </a:lnB>
+                    <a:solidFill>
+                      <a:srgbClr val="EFEFEF"/>
+                    </a:solidFill>
+                  </a:tcPr>
+                </a:tc>
+                <a:tc>
+                  <a:txBody>
+                    <a:bodyPr/>
+                    <a:lstStyle/>
+                    <a:p>
+                      <a:pPr algn="l" fontAlgn="t">
+                        <a:lnSpc>
+                          <a:spcPts val="1800"/>
+                        </a:lnSpc>
+                        <a:buNone/>
+                      </a:pPr>
+                      <a:r>
+                        <a:rPr lang="en-US" sz="1100">
+                          <a:effectLst/>
+                        </a:rPr>
+                        <a:t>Specifies a date, time and timezone value.</a:t>
+                      </a:r>
+                    </a:p>
+                  </a:txBody>
+                  <a:tcPr marL="37232" marR="37232" marT="37232" marB="37232">
+                    <a:lnL w="7620" cap="flat" cmpd="sng" algn="ctr">
+                      <a:solidFill>
+                        <a:srgbClr val="BEBEBE"/>
+                      </a:solidFill>
+                      <a:prstDash val="solid"/>
+                      <a:round/>
+                      <a:headEnd type="none" w="med" len="med"/>
+                      <a:tailEnd type="none" w="med" len="med"/>
+                    </a:lnL>
+                    <a:lnR w="7620" cap="flat" cmpd="sng" algn="ctr">
+                      <a:solidFill>
+                        <a:srgbClr val="BEBEBE"/>
+                      </a:solidFill>
+                      <a:prstDash val="solid"/>
+                      <a:round/>
+                      <a:headEnd type="none" w="med" len="med"/>
+                      <a:tailEnd type="none" w="med" len="med"/>
+                    </a:lnR>
+                    <a:lnT w="7620" cap="flat" cmpd="sng" algn="ctr">
+                      <a:solidFill>
+                        <a:srgbClr val="BEBEBE"/>
+                      </a:solidFill>
+                      <a:prstDash val="solid"/>
+                      <a:round/>
+                      <a:headEnd type="none" w="med" len="med"/>
+                      <a:tailEnd type="none" w="med" len="med"/>
+                    </a:lnT>
+                    <a:lnB w="7620" cap="flat" cmpd="sng" algn="ctr">
+                      <a:solidFill>
+                        <a:srgbClr val="BEBEBE"/>
+                      </a:solidFill>
+                      <a:prstDash val="solid"/>
+                      <a:round/>
+                      <a:headEnd type="none" w="med" len="med"/>
+                      <a:tailEnd type="none" w="med" len="med"/>
+                    </a:lnB>
+                    <a:solidFill>
+                      <a:srgbClr val="EFEFEF"/>
+                    </a:solidFill>
+                  </a:tcPr>
+                </a:tc>
+                <a:extLst>
+                  <a:ext uri="{0D108BD9-81ED-4DB2-BD59-A6C34878D82A}">
+                    <a16:rowId xmlns:a16="http://schemas.microsoft.com/office/drawing/2014/main" val="3151000451"/>
+                  </a:ext>
+                </a:extLst>
+              </a:tr>
+              <a:tr h="901898">
+                <a:tc>
+                  <a:txBody>
+                    <a:bodyPr/>
+                    <a:lstStyle/>
+                    <a:p>
+                      <a:pPr algn="l" fontAlgn="t">
+                        <a:lnSpc>
+                          <a:spcPts val="1800"/>
+                        </a:lnSpc>
+                        <a:buNone/>
+                      </a:pPr>
+                      <a:r>
+                        <a:rPr lang="en-IN" sz="1100">
+                          <a:effectLst/>
+                        </a:rPr>
+                        <a:t>DECIMAL</a:t>
+                      </a:r>
+                    </a:p>
+                  </a:txBody>
+                  <a:tcPr marL="37232" marR="37232" marT="37232" marB="37232">
+                    <a:lnL w="7620" cap="flat" cmpd="sng" algn="ctr">
+                      <a:solidFill>
+                        <a:srgbClr val="BEBEBE"/>
+                      </a:solidFill>
+                      <a:prstDash val="solid"/>
+                      <a:round/>
+                      <a:headEnd type="none" w="med" len="med"/>
+                      <a:tailEnd type="none" w="med" len="med"/>
+                    </a:lnL>
+                    <a:lnR w="7620" cap="flat" cmpd="sng" algn="ctr">
+                      <a:solidFill>
+                        <a:srgbClr val="BEBEBE"/>
+                      </a:solidFill>
+                      <a:prstDash val="solid"/>
+                      <a:round/>
+                      <a:headEnd type="none" w="med" len="med"/>
+                      <a:tailEnd type="none" w="med" len="med"/>
+                    </a:lnR>
+                    <a:lnT w="7620" cap="flat" cmpd="sng" algn="ctr">
+                      <a:solidFill>
+                        <a:srgbClr val="BEBEBE"/>
+                      </a:solidFill>
+                      <a:prstDash val="solid"/>
+                      <a:round/>
+                      <a:headEnd type="none" w="med" len="med"/>
+                      <a:tailEnd type="none" w="med" len="med"/>
+                    </a:lnT>
+                    <a:lnB w="7620" cap="flat" cmpd="sng" algn="ctr">
+                      <a:solidFill>
+                        <a:srgbClr val="BEBEBE"/>
+                      </a:solidFill>
+                      <a:prstDash val="solid"/>
+                      <a:round/>
+                      <a:headEnd type="none" w="med" len="med"/>
+                      <a:tailEnd type="none" w="med" len="med"/>
+                    </a:lnB>
+                    <a:solidFill>
+                      <a:srgbClr val="FFFFFF"/>
+                    </a:solidFill>
+                  </a:tcPr>
+                </a:tc>
+                <a:tc>
+                  <a:txBody>
+                    <a:bodyPr/>
+                    <a:lstStyle/>
+                    <a:p>
+                      <a:pPr algn="l" fontAlgn="t">
+                        <a:lnSpc>
+                          <a:spcPts val="1800"/>
+                        </a:lnSpc>
+                        <a:buNone/>
+                      </a:pPr>
+                      <a:r>
+                        <a:rPr lang="en-US" sz="1100">
+                          <a:effectLst/>
+                        </a:rPr>
+                        <a:t>Specifies a decimal number. It can store a number up to 50 significant digits including 10 digits to the right of the decimal point.</a:t>
+                      </a:r>
+                    </a:p>
+                  </a:txBody>
+                  <a:tcPr marL="37232" marR="37232" marT="37232" marB="37232">
+                    <a:lnL w="7620" cap="flat" cmpd="sng" algn="ctr">
+                      <a:solidFill>
+                        <a:srgbClr val="BEBEBE"/>
+                      </a:solidFill>
+                      <a:prstDash val="solid"/>
+                      <a:round/>
+                      <a:headEnd type="none" w="med" len="med"/>
+                      <a:tailEnd type="none" w="med" len="med"/>
+                    </a:lnL>
+                    <a:lnR w="7620" cap="flat" cmpd="sng" algn="ctr">
+                      <a:solidFill>
+                        <a:srgbClr val="BEBEBE"/>
+                      </a:solidFill>
+                      <a:prstDash val="solid"/>
+                      <a:round/>
+                      <a:headEnd type="none" w="med" len="med"/>
+                      <a:tailEnd type="none" w="med" len="med"/>
+                    </a:lnR>
+                    <a:lnT w="7620" cap="flat" cmpd="sng" algn="ctr">
+                      <a:solidFill>
+                        <a:srgbClr val="BEBEBE"/>
+                      </a:solidFill>
+                      <a:prstDash val="solid"/>
+                      <a:round/>
+                      <a:headEnd type="none" w="med" len="med"/>
+                      <a:tailEnd type="none" w="med" len="med"/>
+                    </a:lnT>
+                    <a:lnB w="7620" cap="flat" cmpd="sng" algn="ctr">
+                      <a:solidFill>
+                        <a:srgbClr val="BEBEBE"/>
+                      </a:solidFill>
+                      <a:prstDash val="solid"/>
+                      <a:round/>
+                      <a:headEnd type="none" w="med" len="med"/>
+                      <a:tailEnd type="none" w="med" len="med"/>
+                    </a:lnB>
+                    <a:solidFill>
+                      <a:srgbClr val="FFFFFF"/>
+                    </a:solidFill>
+                  </a:tcPr>
+                </a:tc>
+                <a:extLst>
+                  <a:ext uri="{0D108BD9-81ED-4DB2-BD59-A6C34878D82A}">
+                    <a16:rowId xmlns:a16="http://schemas.microsoft.com/office/drawing/2014/main" val="3700855955"/>
+                  </a:ext>
+                </a:extLst>
+              </a:tr>
+              <a:tr h="457111">
+                <a:tc>
+                  <a:txBody>
+                    <a:bodyPr/>
+                    <a:lstStyle/>
+                    <a:p>
+                      <a:pPr algn="l" fontAlgn="t">
+                        <a:lnSpc>
+                          <a:spcPts val="1800"/>
+                        </a:lnSpc>
+                        <a:buNone/>
+                      </a:pPr>
+                      <a:r>
+                        <a:rPr lang="en-IN" sz="1100">
+                          <a:effectLst/>
+                        </a:rPr>
+                        <a:t>HANDLE</a:t>
+                      </a:r>
+                    </a:p>
+                  </a:txBody>
+                  <a:tcPr marL="37232" marR="37232" marT="37232" marB="37232">
+                    <a:lnL w="7620" cap="flat" cmpd="sng" algn="ctr">
+                      <a:solidFill>
+                        <a:srgbClr val="BEBEBE"/>
+                      </a:solidFill>
+                      <a:prstDash val="solid"/>
+                      <a:round/>
+                      <a:headEnd type="none" w="med" len="med"/>
+                      <a:tailEnd type="none" w="med" len="med"/>
+                    </a:lnL>
+                    <a:lnR w="7620" cap="flat" cmpd="sng" algn="ctr">
+                      <a:solidFill>
+                        <a:srgbClr val="BEBEBE"/>
+                      </a:solidFill>
+                      <a:prstDash val="solid"/>
+                      <a:round/>
+                      <a:headEnd type="none" w="med" len="med"/>
+                      <a:tailEnd type="none" w="med" len="med"/>
+                    </a:lnR>
+                    <a:lnT w="7620" cap="flat" cmpd="sng" algn="ctr">
+                      <a:solidFill>
+                        <a:srgbClr val="BEBEBE"/>
+                      </a:solidFill>
+                      <a:prstDash val="solid"/>
+                      <a:round/>
+                      <a:headEnd type="none" w="med" len="med"/>
+                      <a:tailEnd type="none" w="med" len="med"/>
+                    </a:lnT>
+                    <a:lnB w="7620" cap="flat" cmpd="sng" algn="ctr">
+                      <a:solidFill>
+                        <a:srgbClr val="BEBEBE"/>
+                      </a:solidFill>
+                      <a:prstDash val="solid"/>
+                      <a:round/>
+                      <a:headEnd type="none" w="med" len="med"/>
+                      <a:tailEnd type="none" w="med" len="med"/>
+                    </a:lnB>
+                    <a:solidFill>
+                      <a:srgbClr val="EFEFEF"/>
+                    </a:solidFill>
+                  </a:tcPr>
+                </a:tc>
+                <a:tc>
+                  <a:txBody>
+                    <a:bodyPr/>
+                    <a:lstStyle/>
+                    <a:p>
+                      <a:pPr algn="l" fontAlgn="t">
+                        <a:lnSpc>
+                          <a:spcPts val="1800"/>
+                        </a:lnSpc>
+                        <a:buNone/>
+                      </a:pPr>
+                      <a:r>
+                        <a:rPr lang="en-US" sz="1100">
+                          <a:effectLst/>
+                        </a:rPr>
+                        <a:t>Specifies a pointer to an object in memory such as a procedure.</a:t>
+                      </a:r>
+                    </a:p>
+                  </a:txBody>
+                  <a:tcPr marL="37232" marR="37232" marT="37232" marB="37232">
+                    <a:lnL w="7620" cap="flat" cmpd="sng" algn="ctr">
+                      <a:solidFill>
+                        <a:srgbClr val="BEBEBE"/>
+                      </a:solidFill>
+                      <a:prstDash val="solid"/>
+                      <a:round/>
+                      <a:headEnd type="none" w="med" len="med"/>
+                      <a:tailEnd type="none" w="med" len="med"/>
+                    </a:lnL>
+                    <a:lnR w="7620" cap="flat" cmpd="sng" algn="ctr">
+                      <a:solidFill>
+                        <a:srgbClr val="BEBEBE"/>
+                      </a:solidFill>
+                      <a:prstDash val="solid"/>
+                      <a:round/>
+                      <a:headEnd type="none" w="med" len="med"/>
+                      <a:tailEnd type="none" w="med" len="med"/>
+                    </a:lnR>
+                    <a:lnT w="7620" cap="flat" cmpd="sng" algn="ctr">
+                      <a:solidFill>
+                        <a:srgbClr val="BEBEBE"/>
+                      </a:solidFill>
+                      <a:prstDash val="solid"/>
+                      <a:round/>
+                      <a:headEnd type="none" w="med" len="med"/>
+                      <a:tailEnd type="none" w="med" len="med"/>
+                    </a:lnT>
+                    <a:lnB w="7620" cap="flat" cmpd="sng" algn="ctr">
+                      <a:solidFill>
+                        <a:srgbClr val="BEBEBE"/>
+                      </a:solidFill>
+                      <a:prstDash val="solid"/>
+                      <a:round/>
+                      <a:headEnd type="none" w="med" len="med"/>
+                      <a:tailEnd type="none" w="med" len="med"/>
+                    </a:lnB>
+                    <a:solidFill>
+                      <a:srgbClr val="EFEFEF"/>
+                    </a:solidFill>
+                  </a:tcPr>
+                </a:tc>
+                <a:extLst>
+                  <a:ext uri="{0D108BD9-81ED-4DB2-BD59-A6C34878D82A}">
+                    <a16:rowId xmlns:a16="http://schemas.microsoft.com/office/drawing/2014/main" val="1695272026"/>
+                  </a:ext>
+                </a:extLst>
+              </a:tr>
+              <a:tr h="393857">
+                <a:tc>
+                  <a:txBody>
+                    <a:bodyPr/>
+                    <a:lstStyle/>
+                    <a:p>
+                      <a:pPr algn="l" fontAlgn="t">
+                        <a:lnSpc>
+                          <a:spcPts val="1800"/>
+                        </a:lnSpc>
+                        <a:buNone/>
+                      </a:pPr>
+                      <a:r>
+                        <a:rPr lang="en-IN" sz="1100">
+                          <a:effectLst/>
+                        </a:rPr>
+                        <a:t>INTEGER</a:t>
+                      </a:r>
+                    </a:p>
+                  </a:txBody>
+                  <a:tcPr marL="37232" marR="37232" marT="37232" marB="37232">
+                    <a:lnL w="7620" cap="flat" cmpd="sng" algn="ctr">
+                      <a:solidFill>
+                        <a:srgbClr val="BEBEBE"/>
+                      </a:solidFill>
+                      <a:prstDash val="solid"/>
+                      <a:round/>
+                      <a:headEnd type="none" w="med" len="med"/>
+                      <a:tailEnd type="none" w="med" len="med"/>
+                    </a:lnL>
+                    <a:lnR w="7620" cap="flat" cmpd="sng" algn="ctr">
+                      <a:solidFill>
+                        <a:srgbClr val="BEBEBE"/>
+                      </a:solidFill>
+                      <a:prstDash val="solid"/>
+                      <a:round/>
+                      <a:headEnd type="none" w="med" len="med"/>
+                      <a:tailEnd type="none" w="med" len="med"/>
+                    </a:lnR>
+                    <a:lnT w="7620" cap="flat" cmpd="sng" algn="ctr">
+                      <a:solidFill>
+                        <a:srgbClr val="BEBEBE"/>
+                      </a:solidFill>
+                      <a:prstDash val="solid"/>
+                      <a:round/>
+                      <a:headEnd type="none" w="med" len="med"/>
+                      <a:tailEnd type="none" w="med" len="med"/>
+                    </a:lnT>
+                    <a:lnB w="7620" cap="flat" cmpd="sng" algn="ctr">
+                      <a:solidFill>
+                        <a:srgbClr val="BEBEBE"/>
+                      </a:solidFill>
+                      <a:prstDash val="solid"/>
+                      <a:round/>
+                      <a:headEnd type="none" w="med" len="med"/>
+                      <a:tailEnd type="none" w="med" len="med"/>
+                    </a:lnB>
+                    <a:solidFill>
+                      <a:srgbClr val="FFFFFF"/>
+                    </a:solidFill>
+                  </a:tcPr>
+                </a:tc>
+                <a:tc>
+                  <a:txBody>
+                    <a:bodyPr/>
+                    <a:lstStyle/>
+                    <a:p>
+                      <a:pPr algn="l" fontAlgn="t">
+                        <a:lnSpc>
+                          <a:spcPts val="1800"/>
+                        </a:lnSpc>
+                        <a:buNone/>
+                      </a:pPr>
+                      <a:r>
+                        <a:rPr lang="en-US" sz="1100">
+                          <a:effectLst/>
+                        </a:rPr>
+                        <a:t>Specifies a positive or negative whole number.</a:t>
+                      </a:r>
+                    </a:p>
+                  </a:txBody>
+                  <a:tcPr marL="37232" marR="37232" marT="37232" marB="37232">
+                    <a:lnL w="7620" cap="flat" cmpd="sng" algn="ctr">
+                      <a:solidFill>
+                        <a:srgbClr val="BEBEBE"/>
+                      </a:solidFill>
+                      <a:prstDash val="solid"/>
+                      <a:round/>
+                      <a:headEnd type="none" w="med" len="med"/>
+                      <a:tailEnd type="none" w="med" len="med"/>
+                    </a:lnL>
+                    <a:lnR w="7620" cap="flat" cmpd="sng" algn="ctr">
+                      <a:solidFill>
+                        <a:srgbClr val="BEBEBE"/>
+                      </a:solidFill>
+                      <a:prstDash val="solid"/>
+                      <a:round/>
+                      <a:headEnd type="none" w="med" len="med"/>
+                      <a:tailEnd type="none" w="med" len="med"/>
+                    </a:lnR>
+                    <a:lnT w="7620" cap="flat" cmpd="sng" algn="ctr">
+                      <a:solidFill>
+                        <a:srgbClr val="BEBEBE"/>
+                      </a:solidFill>
+                      <a:prstDash val="solid"/>
+                      <a:round/>
+                      <a:headEnd type="none" w="med" len="med"/>
+                      <a:tailEnd type="none" w="med" len="med"/>
+                    </a:lnT>
+                    <a:lnB w="7620" cap="flat" cmpd="sng" algn="ctr">
+                      <a:solidFill>
+                        <a:srgbClr val="BEBEBE"/>
+                      </a:solidFill>
+                      <a:prstDash val="solid"/>
+                      <a:round/>
+                      <a:headEnd type="none" w="med" len="med"/>
+                      <a:tailEnd type="none" w="med" len="med"/>
+                    </a:lnB>
+                    <a:solidFill>
+                      <a:srgbClr val="FFFFFF"/>
+                    </a:solidFill>
+                  </a:tcPr>
+                </a:tc>
+                <a:extLst>
+                  <a:ext uri="{0D108BD9-81ED-4DB2-BD59-A6C34878D82A}">
+                    <a16:rowId xmlns:a16="http://schemas.microsoft.com/office/drawing/2014/main" val="2189140928"/>
+                  </a:ext>
+                </a:extLst>
+              </a:tr>
+              <a:tr h="457111">
+                <a:tc>
+                  <a:txBody>
+                    <a:bodyPr/>
+                    <a:lstStyle/>
+                    <a:p>
+                      <a:pPr algn="l" fontAlgn="t">
+                        <a:lnSpc>
+                          <a:spcPts val="1800"/>
+                        </a:lnSpc>
+                        <a:buNone/>
+                      </a:pPr>
+                      <a:r>
+                        <a:rPr lang="en-IN" sz="1100">
+                          <a:effectLst/>
+                        </a:rPr>
+                        <a:t>INT64</a:t>
+                      </a:r>
+                    </a:p>
+                  </a:txBody>
+                  <a:tcPr marL="37232" marR="37232" marT="37232" marB="37232">
+                    <a:lnL w="7620" cap="flat" cmpd="sng" algn="ctr">
+                      <a:solidFill>
+                        <a:srgbClr val="BEBEBE"/>
+                      </a:solidFill>
+                      <a:prstDash val="solid"/>
+                      <a:round/>
+                      <a:headEnd type="none" w="med" len="med"/>
+                      <a:tailEnd type="none" w="med" len="med"/>
+                    </a:lnL>
+                    <a:lnR w="7620" cap="flat" cmpd="sng" algn="ctr">
+                      <a:solidFill>
+                        <a:srgbClr val="BEBEBE"/>
+                      </a:solidFill>
+                      <a:prstDash val="solid"/>
+                      <a:round/>
+                      <a:headEnd type="none" w="med" len="med"/>
+                      <a:tailEnd type="none" w="med" len="med"/>
+                    </a:lnR>
+                    <a:lnT w="7620" cap="flat" cmpd="sng" algn="ctr">
+                      <a:solidFill>
+                        <a:srgbClr val="BEBEBE"/>
+                      </a:solidFill>
+                      <a:prstDash val="solid"/>
+                      <a:round/>
+                      <a:headEnd type="none" w="med" len="med"/>
+                      <a:tailEnd type="none" w="med" len="med"/>
+                    </a:lnT>
+                    <a:lnB w="7620" cap="flat" cmpd="sng" algn="ctr">
+                      <a:solidFill>
+                        <a:srgbClr val="BEBEBE"/>
+                      </a:solidFill>
+                      <a:prstDash val="solid"/>
+                      <a:round/>
+                      <a:headEnd type="none" w="med" len="med"/>
+                      <a:tailEnd type="none" w="med" len="med"/>
+                    </a:lnB>
+                    <a:solidFill>
+                      <a:srgbClr val="EFEFEF"/>
+                    </a:solidFill>
+                  </a:tcPr>
+                </a:tc>
+                <a:tc>
+                  <a:txBody>
+                    <a:bodyPr/>
+                    <a:lstStyle/>
+                    <a:p>
+                      <a:pPr algn="l" fontAlgn="t">
+                        <a:lnSpc>
+                          <a:spcPts val="1800"/>
+                        </a:lnSpc>
+                        <a:buNone/>
+                      </a:pPr>
+                      <a:r>
+                        <a:rPr lang="en-US" sz="1100">
+                          <a:effectLst/>
+                        </a:rPr>
+                        <a:t>Specifies a 64 bit positive or negative whole number.</a:t>
+                      </a:r>
+                    </a:p>
+                  </a:txBody>
+                  <a:tcPr marL="37232" marR="37232" marT="37232" marB="37232">
+                    <a:lnL w="7620" cap="flat" cmpd="sng" algn="ctr">
+                      <a:solidFill>
+                        <a:srgbClr val="BEBEBE"/>
+                      </a:solidFill>
+                      <a:prstDash val="solid"/>
+                      <a:round/>
+                      <a:headEnd type="none" w="med" len="med"/>
+                      <a:tailEnd type="none" w="med" len="med"/>
+                    </a:lnL>
+                    <a:lnR w="7620" cap="flat" cmpd="sng" algn="ctr">
+                      <a:solidFill>
+                        <a:srgbClr val="BEBEBE"/>
+                      </a:solidFill>
+                      <a:prstDash val="solid"/>
+                      <a:round/>
+                      <a:headEnd type="none" w="med" len="med"/>
+                      <a:tailEnd type="none" w="med" len="med"/>
+                    </a:lnR>
+                    <a:lnT w="7620" cap="flat" cmpd="sng" algn="ctr">
+                      <a:solidFill>
+                        <a:srgbClr val="BEBEBE"/>
+                      </a:solidFill>
+                      <a:prstDash val="solid"/>
+                      <a:round/>
+                      <a:headEnd type="none" w="med" len="med"/>
+                      <a:tailEnd type="none" w="med" len="med"/>
+                    </a:lnT>
+                    <a:lnB w="7620" cap="flat" cmpd="sng" algn="ctr">
+                      <a:solidFill>
+                        <a:srgbClr val="BEBEBE"/>
+                      </a:solidFill>
+                      <a:prstDash val="solid"/>
+                      <a:round/>
+                      <a:headEnd type="none" w="med" len="med"/>
+                      <a:tailEnd type="none" w="med" len="med"/>
+                    </a:lnB>
+                    <a:solidFill>
+                      <a:srgbClr val="EFEFEF"/>
+                    </a:solidFill>
+                  </a:tcPr>
+                </a:tc>
+                <a:extLst>
+                  <a:ext uri="{0D108BD9-81ED-4DB2-BD59-A6C34878D82A}">
+                    <a16:rowId xmlns:a16="http://schemas.microsoft.com/office/drawing/2014/main" val="3085568162"/>
+                  </a:ext>
+                </a:extLst>
+              </a:tr>
+              <a:tr h="563204">
+                <a:tc>
+                  <a:txBody>
+                    <a:bodyPr/>
+                    <a:lstStyle/>
+                    <a:p>
+                      <a:pPr algn="l" fontAlgn="t">
+                        <a:lnSpc>
+                          <a:spcPts val="1800"/>
+                        </a:lnSpc>
+                        <a:buNone/>
+                      </a:pPr>
+                      <a:r>
+                        <a:rPr lang="en-IN" sz="1100">
+                          <a:effectLst/>
+                        </a:rPr>
+                        <a:t>LOGICAL</a:t>
+                      </a:r>
+                    </a:p>
+                  </a:txBody>
+                  <a:tcPr marL="37232" marR="37232" marT="37232" marB="37232">
+                    <a:lnL w="7620" cap="flat" cmpd="sng" algn="ctr">
+                      <a:solidFill>
+                        <a:srgbClr val="BEBEBE"/>
+                      </a:solidFill>
+                      <a:prstDash val="solid"/>
+                      <a:round/>
+                      <a:headEnd type="none" w="med" len="med"/>
+                      <a:tailEnd type="none" w="med" len="med"/>
+                    </a:lnL>
+                    <a:lnR w="7620" cap="flat" cmpd="sng" algn="ctr">
+                      <a:solidFill>
+                        <a:srgbClr val="BEBEBE"/>
+                      </a:solidFill>
+                      <a:prstDash val="solid"/>
+                      <a:round/>
+                      <a:headEnd type="none" w="med" len="med"/>
+                      <a:tailEnd type="none" w="med" len="med"/>
+                    </a:lnR>
+                    <a:lnT w="7620" cap="flat" cmpd="sng" algn="ctr">
+                      <a:solidFill>
+                        <a:srgbClr val="BEBEBE"/>
+                      </a:solidFill>
+                      <a:prstDash val="solid"/>
+                      <a:round/>
+                      <a:headEnd type="none" w="med" len="med"/>
+                      <a:tailEnd type="none" w="med" len="med"/>
+                    </a:lnT>
+                    <a:lnB w="7620" cap="flat" cmpd="sng" algn="ctr">
+                      <a:solidFill>
+                        <a:srgbClr val="BEBEBE"/>
+                      </a:solidFill>
+                      <a:prstDash val="solid"/>
+                      <a:round/>
+                      <a:headEnd type="none" w="med" len="med"/>
+                      <a:tailEnd type="none" w="med" len="med"/>
+                    </a:lnB>
+                    <a:solidFill>
+                      <a:srgbClr val="FFFFFF"/>
+                    </a:solidFill>
+                  </a:tcPr>
+                </a:tc>
+                <a:tc>
+                  <a:txBody>
+                    <a:bodyPr/>
+                    <a:lstStyle/>
+                    <a:p>
+                      <a:pPr algn="l" fontAlgn="t">
+                        <a:lnSpc>
+                          <a:spcPts val="1800"/>
+                        </a:lnSpc>
+                        <a:buNone/>
+                      </a:pPr>
+                      <a:r>
+                        <a:rPr lang="en-US" sz="1100">
+                          <a:effectLst/>
+                        </a:rPr>
+                        <a:t>Specifies a Boolean value that evaluates to YES/NO or TRUE/FALSE.</a:t>
+                      </a:r>
+                    </a:p>
+                  </a:txBody>
+                  <a:tcPr marL="37232" marR="37232" marT="37232" marB="37232">
+                    <a:lnL w="7620" cap="flat" cmpd="sng" algn="ctr">
+                      <a:solidFill>
+                        <a:srgbClr val="BEBEBE"/>
+                      </a:solidFill>
+                      <a:prstDash val="solid"/>
+                      <a:round/>
+                      <a:headEnd type="none" w="med" len="med"/>
+                      <a:tailEnd type="none" w="med" len="med"/>
+                    </a:lnL>
+                    <a:lnR w="7620" cap="flat" cmpd="sng" algn="ctr">
+                      <a:solidFill>
+                        <a:srgbClr val="BEBEBE"/>
+                      </a:solidFill>
+                      <a:prstDash val="solid"/>
+                      <a:round/>
+                      <a:headEnd type="none" w="med" len="med"/>
+                      <a:tailEnd type="none" w="med" len="med"/>
+                    </a:lnR>
+                    <a:lnT w="7620" cap="flat" cmpd="sng" algn="ctr">
+                      <a:solidFill>
+                        <a:srgbClr val="BEBEBE"/>
+                      </a:solidFill>
+                      <a:prstDash val="solid"/>
+                      <a:round/>
+                      <a:headEnd type="none" w="med" len="med"/>
+                      <a:tailEnd type="none" w="med" len="med"/>
+                    </a:lnT>
+                    <a:lnB w="7620" cap="flat" cmpd="sng" algn="ctr">
+                      <a:solidFill>
+                        <a:srgbClr val="BEBEBE"/>
+                      </a:solidFill>
+                      <a:prstDash val="solid"/>
+                      <a:round/>
+                      <a:headEnd type="none" w="med" len="med"/>
+                      <a:tailEnd type="none" w="med" len="med"/>
+                    </a:lnB>
+                    <a:solidFill>
+                      <a:srgbClr val="FFFFFF"/>
+                    </a:solidFill>
+                  </a:tcPr>
+                </a:tc>
+                <a:extLst>
+                  <a:ext uri="{0D108BD9-81ED-4DB2-BD59-A6C34878D82A}">
+                    <a16:rowId xmlns:a16="http://schemas.microsoft.com/office/drawing/2014/main" val="3658553460"/>
+                  </a:ext>
+                </a:extLst>
+              </a:tr>
+              <a:tr h="563204">
+                <a:tc>
+                  <a:txBody>
+                    <a:bodyPr/>
+                    <a:lstStyle/>
+                    <a:p>
+                      <a:pPr algn="l" fontAlgn="t">
+                        <a:lnSpc>
+                          <a:spcPts val="1800"/>
+                        </a:lnSpc>
+                        <a:buNone/>
+                      </a:pPr>
+                      <a:r>
+                        <a:rPr lang="en-IN" sz="1100">
+                          <a:effectLst/>
+                        </a:rPr>
+                        <a:t>ROWID</a:t>
+                      </a:r>
+                    </a:p>
+                  </a:txBody>
+                  <a:tcPr marL="37232" marR="37232" marT="37232" marB="37232">
+                    <a:lnL w="7620" cap="flat" cmpd="sng" algn="ctr">
+                      <a:solidFill>
+                        <a:srgbClr val="BEBEBE"/>
+                      </a:solidFill>
+                      <a:prstDash val="solid"/>
+                      <a:round/>
+                      <a:headEnd type="none" w="med" len="med"/>
+                      <a:tailEnd type="none" w="med" len="med"/>
+                    </a:lnL>
+                    <a:lnR w="7620" cap="flat" cmpd="sng" algn="ctr">
+                      <a:solidFill>
+                        <a:srgbClr val="BEBEBE"/>
+                      </a:solidFill>
+                      <a:prstDash val="solid"/>
+                      <a:round/>
+                      <a:headEnd type="none" w="med" len="med"/>
+                      <a:tailEnd type="none" w="med" len="med"/>
+                    </a:lnR>
+                    <a:lnT w="7620" cap="flat" cmpd="sng" algn="ctr">
+                      <a:solidFill>
+                        <a:srgbClr val="BEBEBE"/>
+                      </a:solidFill>
+                      <a:prstDash val="solid"/>
+                      <a:round/>
+                      <a:headEnd type="none" w="med" len="med"/>
+                      <a:tailEnd type="none" w="med" len="med"/>
+                    </a:lnT>
+                    <a:lnB w="7620" cap="flat" cmpd="sng" algn="ctr">
+                      <a:solidFill>
+                        <a:srgbClr val="BEBEBE"/>
+                      </a:solidFill>
+                      <a:prstDash val="solid"/>
+                      <a:round/>
+                      <a:headEnd type="none" w="med" len="med"/>
+                      <a:tailEnd type="none" w="med" len="med"/>
+                    </a:lnB>
+                    <a:solidFill>
+                      <a:srgbClr val="EFEFEF"/>
+                    </a:solidFill>
+                  </a:tcPr>
+                </a:tc>
+                <a:tc>
+                  <a:txBody>
+                    <a:bodyPr/>
+                    <a:lstStyle/>
+                    <a:p>
+                      <a:pPr algn="l" fontAlgn="t">
+                        <a:lnSpc>
+                          <a:spcPts val="1800"/>
+                        </a:lnSpc>
+                        <a:buNone/>
+                      </a:pPr>
+                      <a:r>
+                        <a:rPr lang="en-US" sz="1100" dirty="0">
+                          <a:effectLst/>
+                        </a:rPr>
+                        <a:t>Specifies a unique identifier for a record. It stores a hexadecimal that points to its location on disk.</a:t>
+                      </a:r>
+                    </a:p>
+                  </a:txBody>
+                  <a:tcPr marL="37232" marR="37232" marT="37232" marB="37232">
+                    <a:lnL w="7620" cap="flat" cmpd="sng" algn="ctr">
+                      <a:solidFill>
+                        <a:srgbClr val="BEBEBE"/>
+                      </a:solidFill>
+                      <a:prstDash val="solid"/>
+                      <a:round/>
+                      <a:headEnd type="none" w="med" len="med"/>
+                      <a:tailEnd type="none" w="med" len="med"/>
+                    </a:lnL>
+                    <a:lnR w="7620" cap="flat" cmpd="sng" algn="ctr">
+                      <a:solidFill>
+                        <a:srgbClr val="BEBEBE"/>
+                      </a:solidFill>
+                      <a:prstDash val="solid"/>
+                      <a:round/>
+                      <a:headEnd type="none" w="med" len="med"/>
+                      <a:tailEnd type="none" w="med" len="med"/>
+                    </a:lnR>
+                    <a:lnT w="7620" cap="flat" cmpd="sng" algn="ctr">
+                      <a:solidFill>
+                        <a:srgbClr val="BEBEBE"/>
+                      </a:solidFill>
+                      <a:prstDash val="solid"/>
+                      <a:round/>
+                      <a:headEnd type="none" w="med" len="med"/>
+                      <a:tailEnd type="none" w="med" len="med"/>
+                    </a:lnT>
+                    <a:lnB w="7620" cap="flat" cmpd="sng" algn="ctr">
+                      <a:solidFill>
+                        <a:srgbClr val="BEBEBE"/>
+                      </a:solidFill>
+                      <a:prstDash val="solid"/>
+                      <a:round/>
+                      <a:headEnd type="none" w="med" len="med"/>
+                      <a:tailEnd type="none" w="med" len="med"/>
+                    </a:lnB>
+                    <a:solidFill>
+                      <a:srgbClr val="EFEFEF"/>
+                    </a:solidFill>
+                  </a:tcPr>
+                </a:tc>
+                <a:extLst>
+                  <a:ext uri="{0D108BD9-81ED-4DB2-BD59-A6C34878D82A}">
+                    <a16:rowId xmlns:a16="http://schemas.microsoft.com/office/drawing/2014/main" val="2449796359"/>
+                  </a:ext>
+                </a:extLst>
+              </a:tr>
+            </a:tbl>
+          </a:graphicData>
+        </a:graphic>
+      </p:graphicFrame>
     </p:spTree>
   </p:cSld>
   <p:clrMapOvr>
@@ -3873,7 +5324,7 @@
 </file>
 
 <file path=ppt/slides/slide7.xml><?xml version="1.0" encoding="utf-8"?>
-<p:sld xmlns:a="http://schemas.openxmlformats.org/drawingml/2006/main" xmlns:p="http://schemas.openxmlformats.org/presentationml/2006/main" xmlns:r="http://schemas.openxmlformats.org/officeDocument/2006/relationships">
+<p:sld xmlns:a="http://schemas.openxmlformats.org/drawingml/2006/main" xmlns:r="http://schemas.openxmlformats.org/officeDocument/2006/relationships" xmlns:p="http://schemas.openxmlformats.org/presentationml/2006/main">
   <p:cSld>
     <p:spTree>
       <p:nvGrpSpPr>
@@ -3881,7 +5332,14 @@
         <p:cNvGrpSpPr/>
         <p:nvPr/>
       </p:nvGrpSpPr>
-      <p:grpSpPr/>
+      <p:grpSpPr>
+        <a:xfrm>
+          <a:off x="0" y="0"/>
+          <a:ext cx="0" cy="0"/>
+          <a:chOff x="0" y="0"/>
+          <a:chExt cx="0" cy="0"/>
+        </a:xfrm>
+      </p:grpSpPr>
       <p:sp>
         <p:nvSpPr>
           <p:cNvPr id="2" name="Title 1"/>
@@ -3918,38 +5376,43 @@
           <a:bodyPr/>
           <a:lstStyle/>
           <a:p>
-            <a:pPr/>
-            <a:r>
+            <a:r>
+              <a:rPr dirty="0"/>
               <a:t>CHARACTER → empty string</a:t>
             </a:r>
-          </a:p>
-          <a:p>
-            <a:pPr/>
-            <a:r>
+            <a:r>
+              <a:rPr lang="en-IN" dirty="0"/>
+              <a:t> “”</a:t>
+            </a:r>
+            <a:endParaRPr dirty="0"/>
+          </a:p>
+          <a:p>
+            <a:r>
+              <a:rPr dirty="0"/>
               <a:t>INTEGER / INT64 → 0</a:t>
             </a:r>
           </a:p>
           <a:p>
-            <a:pPr/>
-            <a:r>
+            <a:r>
+              <a:rPr dirty="0"/>
               <a:t>DECIMAL → 0.00</a:t>
             </a:r>
           </a:p>
           <a:p>
-            <a:pPr/>
-            <a:r>
+            <a:r>
+              <a:rPr dirty="0"/>
               <a:t>LOGICAL → FALSE</a:t>
             </a:r>
           </a:p>
           <a:p>
-            <a:pPr/>
-            <a:r>
+            <a:r>
+              <a:rPr dirty="0"/>
               <a:t>DATE / DATETIME → default blank/date</a:t>
             </a:r>
           </a:p>
           <a:p>
-            <a:pPr/>
-            <a:r>
+            <a:r>
+              <a:rPr dirty="0"/>
               <a:t>HANDLE / CLASS / BLOB → undefined (?)</a:t>
             </a:r>
           </a:p>
@@ -3964,7 +5427,7 @@
 </file>
 
 <file path=ppt/slides/slide8.xml><?xml version="1.0" encoding="utf-8"?>
-<p:sld xmlns:a="http://schemas.openxmlformats.org/drawingml/2006/main" xmlns:p="http://schemas.openxmlformats.org/presentationml/2006/main" xmlns:r="http://schemas.openxmlformats.org/officeDocument/2006/relationships">
+<p:sld xmlns:a="http://schemas.openxmlformats.org/drawingml/2006/main" xmlns:r="http://schemas.openxmlformats.org/officeDocument/2006/relationships" xmlns:p="http://schemas.openxmlformats.org/presentationml/2006/main">
   <p:cSld>
     <p:spTree>
       <p:nvGrpSpPr>
@@ -3972,7 +5435,14 @@
         <p:cNvGrpSpPr/>
         <p:nvPr/>
       </p:nvGrpSpPr>
-      <p:grpSpPr/>
+      <p:grpSpPr>
+        <a:xfrm>
+          <a:off x="0" y="0"/>
+          <a:ext cx="0" cy="0"/>
+          <a:chOff x="0" y="0"/>
+          <a:chExt cx="0" cy="0"/>
+        </a:xfrm>
+      </p:grpSpPr>
       <p:sp>
         <p:nvSpPr>
           <p:cNvPr id="2" name="Title 1"/>
@@ -3994,52 +5464,1464 @@
           </a:p>
         </p:txBody>
       </p:sp>
-      <p:sp>
-        <p:nvSpPr>
-          <p:cNvPr id="3" name="Content Placeholder 2"/>
-          <p:cNvSpPr>
-            <a:spLocks noGrp="1"/>
-          </p:cNvSpPr>
-          <p:nvPr>
-            <p:ph idx="1"/>
-          </p:nvPr>
-        </p:nvSpPr>
-        <p:spPr/>
-        <p:txBody>
-          <a:bodyPr/>
-          <a:lstStyle/>
-          <a:p>
-            <a:pPr/>
-            <a:r>
-              <a:t>INTEGER → -&gt;&gt;,&gt;&gt;9</a:t>
-            </a:r>
-          </a:p>
-          <a:p>
-            <a:pPr/>
-            <a:r>
-              <a:t>DECIMAL → -&gt;&gt;,&gt;&gt;9.99</a:t>
-            </a:r>
-          </a:p>
-          <a:p>
-            <a:pPr/>
-            <a:r>
-              <a:t>LOGICAL → TRUE/FALSE</a:t>
-            </a:r>
-          </a:p>
-          <a:p>
-            <a:pPr/>
-            <a:r>
-              <a:t>DATE → 99/99/9999</a:t>
-            </a:r>
-          </a:p>
-          <a:p>
-            <a:pPr/>
-            <a:r>
-              <a:t>DATETIME → 99/99/9999 99:99:99</a:t>
-            </a:r>
-          </a:p>
-        </p:txBody>
-      </p:sp>
+      <p:graphicFrame>
+        <p:nvGraphicFramePr>
+          <p:cNvPr id="4" name="Table 3">
+            <a:extLst>
+              <a:ext uri="{FF2B5EF4-FFF2-40B4-BE49-F238E27FC236}">
+                <a16:creationId xmlns:a16="http://schemas.microsoft.com/office/drawing/2014/main" id="{2A1A84E8-CF99-CC2B-8330-EAD9857A7D0C}"/>
+              </a:ext>
+            </a:extLst>
+          </p:cNvPr>
+          <p:cNvGraphicFramePr>
+            <a:graphicFrameLocks noGrp="1"/>
+          </p:cNvGraphicFramePr>
+          <p:nvPr/>
+        </p:nvGraphicFramePr>
+        <p:xfrm>
+          <a:off x="1330261" y="2053431"/>
+          <a:ext cx="6483478" cy="3619500"/>
+        </p:xfrm>
+        <a:graphic>
+          <a:graphicData uri="http://schemas.openxmlformats.org/drawingml/2006/table">
+            <a:tbl>
+              <a:tblPr/>
+              <a:tblGrid>
+                <a:gridCol w="3241739">
+                  <a:extLst>
+                    <a:ext uri="{9D8B030D-6E8A-4147-A177-3AD203B41FA5}">
+                      <a16:colId xmlns:a16="http://schemas.microsoft.com/office/drawing/2014/main" val="3118480598"/>
+                    </a:ext>
+                  </a:extLst>
+                </a:gridCol>
+                <a:gridCol w="3241739">
+                  <a:extLst>
+                    <a:ext uri="{9D8B030D-6E8A-4147-A177-3AD203B41FA5}">
+                      <a16:colId xmlns:a16="http://schemas.microsoft.com/office/drawing/2014/main" val="967115234"/>
+                    </a:ext>
+                  </a:extLst>
+                </a:gridCol>
+              </a:tblGrid>
+              <a:tr h="0">
+                <a:tc>
+                  <a:txBody>
+                    <a:bodyPr/>
+                    <a:lstStyle/>
+                    <a:p>
+                      <a:pPr algn="l" fontAlgn="t">
+                        <a:lnSpc>
+                          <a:spcPts val="1800"/>
+                        </a:lnSpc>
+                        <a:buNone/>
+                      </a:pPr>
+                      <a:r>
+                        <a:rPr lang="en-IN">
+                          <a:effectLst/>
+                        </a:rPr>
+                        <a:t>Data type</a:t>
+                      </a:r>
+                    </a:p>
+                  </a:txBody>
+                  <a:tcPr marL="60960" marR="60960" marT="60960" marB="60960">
+                    <a:lnL w="7620" cap="flat" cmpd="sng" algn="ctr">
+                      <a:solidFill>
+                        <a:srgbClr val="BEBEBE"/>
+                      </a:solidFill>
+                      <a:prstDash val="solid"/>
+                      <a:round/>
+                      <a:headEnd type="none" w="med" len="med"/>
+                      <a:tailEnd type="none" w="med" len="med"/>
+                    </a:lnL>
+                    <a:lnR w="7620" cap="flat" cmpd="sng" algn="ctr">
+                      <a:solidFill>
+                        <a:srgbClr val="BEBEBE"/>
+                      </a:solidFill>
+                      <a:prstDash val="solid"/>
+                      <a:round/>
+                      <a:headEnd type="none" w="med" len="med"/>
+                      <a:tailEnd type="none" w="med" len="med"/>
+                    </a:lnR>
+                    <a:lnT w="7620" cap="flat" cmpd="sng" algn="ctr">
+                      <a:solidFill>
+                        <a:srgbClr val="BEBEBE"/>
+                      </a:solidFill>
+                      <a:prstDash val="solid"/>
+                      <a:round/>
+                      <a:headEnd type="none" w="med" len="med"/>
+                      <a:tailEnd type="none" w="med" len="med"/>
+                    </a:lnT>
+                    <a:lnB w="7620" cap="flat" cmpd="sng" algn="ctr">
+                      <a:solidFill>
+                        <a:srgbClr val="BEBEBE"/>
+                      </a:solidFill>
+                      <a:prstDash val="solid"/>
+                      <a:round/>
+                      <a:headEnd type="none" w="med" len="med"/>
+                      <a:tailEnd type="none" w="med" len="med"/>
+                    </a:lnB>
+                    <a:solidFill>
+                      <a:srgbClr val="E9EEEE"/>
+                    </a:solidFill>
+                  </a:tcPr>
+                </a:tc>
+                <a:tc>
+                  <a:txBody>
+                    <a:bodyPr/>
+                    <a:lstStyle/>
+                    <a:p>
+                      <a:pPr algn="l" fontAlgn="t">
+                        <a:lnSpc>
+                          <a:spcPts val="1800"/>
+                        </a:lnSpc>
+                        <a:buNone/>
+                      </a:pPr>
+                      <a:r>
+                        <a:rPr lang="en-IN">
+                          <a:effectLst/>
+                        </a:rPr>
+                        <a:t>Default display format</a:t>
+                      </a:r>
+                    </a:p>
+                  </a:txBody>
+                  <a:tcPr marL="60960" marR="60960" marT="60960" marB="60960">
+                    <a:lnL w="7620" cap="flat" cmpd="sng" algn="ctr">
+                      <a:solidFill>
+                        <a:srgbClr val="BEBEBE"/>
+                      </a:solidFill>
+                      <a:prstDash val="solid"/>
+                      <a:round/>
+                      <a:headEnd type="none" w="med" len="med"/>
+                      <a:tailEnd type="none" w="med" len="med"/>
+                    </a:lnL>
+                    <a:lnR w="7620" cap="flat" cmpd="sng" algn="ctr">
+                      <a:solidFill>
+                        <a:srgbClr val="BEBEBE"/>
+                      </a:solidFill>
+                      <a:prstDash val="solid"/>
+                      <a:round/>
+                      <a:headEnd type="none" w="med" len="med"/>
+                      <a:tailEnd type="none" w="med" len="med"/>
+                    </a:lnR>
+                    <a:lnT w="7620" cap="flat" cmpd="sng" algn="ctr">
+                      <a:solidFill>
+                        <a:srgbClr val="BEBEBE"/>
+                      </a:solidFill>
+                      <a:prstDash val="solid"/>
+                      <a:round/>
+                      <a:headEnd type="none" w="med" len="med"/>
+                      <a:tailEnd type="none" w="med" len="med"/>
+                    </a:lnT>
+                    <a:lnB w="7620" cap="flat" cmpd="sng" algn="ctr">
+                      <a:solidFill>
+                        <a:srgbClr val="BEBEBE"/>
+                      </a:solidFill>
+                      <a:prstDash val="solid"/>
+                      <a:round/>
+                      <a:headEnd type="none" w="med" len="med"/>
+                      <a:tailEnd type="none" w="med" len="med"/>
+                    </a:lnB>
+                    <a:solidFill>
+                      <a:srgbClr val="E9EEEE"/>
+                    </a:solidFill>
+                  </a:tcPr>
+                </a:tc>
+                <a:extLst>
+                  <a:ext uri="{0D108BD9-81ED-4DB2-BD59-A6C34878D82A}">
+                    <a16:rowId xmlns:a16="http://schemas.microsoft.com/office/drawing/2014/main" val="1576349572"/>
+                  </a:ext>
+                </a:extLst>
+              </a:tr>
+              <a:tr h="0">
+                <a:tc>
+                  <a:txBody>
+                    <a:bodyPr/>
+                    <a:lstStyle/>
+                    <a:p>
+                      <a:pPr algn="l" fontAlgn="t">
+                        <a:lnSpc>
+                          <a:spcPts val="1800"/>
+                        </a:lnSpc>
+                        <a:buNone/>
+                      </a:pPr>
+                      <a:r>
+                        <a:rPr lang="en-IN">
+                          <a:solidFill>
+                            <a:srgbClr val="404040"/>
+                          </a:solidFill>
+                          <a:effectLst/>
+                          <a:latin typeface="Courier New" panose="02070309020205020404" pitchFamily="49" charset="0"/>
+                        </a:rPr>
+                        <a:t>CHARACTER</a:t>
+                      </a:r>
+                      <a:endParaRPr lang="en-IN">
+                        <a:effectLst/>
+                      </a:endParaRPr>
+                    </a:p>
+                  </a:txBody>
+                  <a:tcPr marL="60960" marR="60960" marT="60960" marB="60960">
+                    <a:lnL w="7620" cap="flat" cmpd="sng" algn="ctr">
+                      <a:solidFill>
+                        <a:srgbClr val="BEBEBE"/>
+                      </a:solidFill>
+                      <a:prstDash val="solid"/>
+                      <a:round/>
+                      <a:headEnd type="none" w="med" len="med"/>
+                      <a:tailEnd type="none" w="med" len="med"/>
+                    </a:lnL>
+                    <a:lnR w="7620" cap="flat" cmpd="sng" algn="ctr">
+                      <a:solidFill>
+                        <a:srgbClr val="BEBEBE"/>
+                      </a:solidFill>
+                      <a:prstDash val="solid"/>
+                      <a:round/>
+                      <a:headEnd type="none" w="med" len="med"/>
+                      <a:tailEnd type="none" w="med" len="med"/>
+                    </a:lnR>
+                    <a:lnT w="7620" cap="flat" cmpd="sng" algn="ctr">
+                      <a:solidFill>
+                        <a:srgbClr val="BEBEBE"/>
+                      </a:solidFill>
+                      <a:prstDash val="solid"/>
+                      <a:round/>
+                      <a:headEnd type="none" w="med" len="med"/>
+                      <a:tailEnd type="none" w="med" len="med"/>
+                    </a:lnT>
+                    <a:lnB w="7620" cap="flat" cmpd="sng" algn="ctr">
+                      <a:solidFill>
+                        <a:srgbClr val="BEBEBE"/>
+                      </a:solidFill>
+                      <a:prstDash val="solid"/>
+                      <a:round/>
+                      <a:headEnd type="none" w="med" len="med"/>
+                      <a:tailEnd type="none" w="med" len="med"/>
+                    </a:lnB>
+                    <a:solidFill>
+                      <a:srgbClr val="FFFFFF"/>
+                    </a:solidFill>
+                  </a:tcPr>
+                </a:tc>
+                <a:tc>
+                  <a:txBody>
+                    <a:bodyPr/>
+                    <a:lstStyle/>
+                    <a:p>
+                      <a:pPr algn="l" fontAlgn="t">
+                        <a:lnSpc>
+                          <a:spcPts val="1800"/>
+                        </a:lnSpc>
+                        <a:buNone/>
+                      </a:pPr>
+                      <a:r>
+                        <a:rPr lang="en-IN">
+                          <a:solidFill>
+                            <a:srgbClr val="404040"/>
+                          </a:solidFill>
+                          <a:effectLst/>
+                          <a:latin typeface="Courier New" panose="02070309020205020404" pitchFamily="49" charset="0"/>
+                        </a:rPr>
+                        <a:t>X(8)</a:t>
+                      </a:r>
+                      <a:endParaRPr lang="en-IN">
+                        <a:effectLst/>
+                      </a:endParaRPr>
+                    </a:p>
+                  </a:txBody>
+                  <a:tcPr marL="60960" marR="60960" marT="60960" marB="60960">
+                    <a:lnL w="7620" cap="flat" cmpd="sng" algn="ctr">
+                      <a:solidFill>
+                        <a:srgbClr val="BEBEBE"/>
+                      </a:solidFill>
+                      <a:prstDash val="solid"/>
+                      <a:round/>
+                      <a:headEnd type="none" w="med" len="med"/>
+                      <a:tailEnd type="none" w="med" len="med"/>
+                    </a:lnL>
+                    <a:lnR w="7620" cap="flat" cmpd="sng" algn="ctr">
+                      <a:solidFill>
+                        <a:srgbClr val="BEBEBE"/>
+                      </a:solidFill>
+                      <a:prstDash val="solid"/>
+                      <a:round/>
+                      <a:headEnd type="none" w="med" len="med"/>
+                      <a:tailEnd type="none" w="med" len="med"/>
+                    </a:lnR>
+                    <a:lnT w="7620" cap="flat" cmpd="sng" algn="ctr">
+                      <a:solidFill>
+                        <a:srgbClr val="BEBEBE"/>
+                      </a:solidFill>
+                      <a:prstDash val="solid"/>
+                      <a:round/>
+                      <a:headEnd type="none" w="med" len="med"/>
+                      <a:tailEnd type="none" w="med" len="med"/>
+                    </a:lnT>
+                    <a:lnB w="7620" cap="flat" cmpd="sng" algn="ctr">
+                      <a:solidFill>
+                        <a:srgbClr val="BEBEBE"/>
+                      </a:solidFill>
+                      <a:prstDash val="solid"/>
+                      <a:round/>
+                      <a:headEnd type="none" w="med" len="med"/>
+                      <a:tailEnd type="none" w="med" len="med"/>
+                    </a:lnB>
+                    <a:solidFill>
+                      <a:srgbClr val="FFFFFF"/>
+                    </a:solidFill>
+                  </a:tcPr>
+                </a:tc>
+                <a:extLst>
+                  <a:ext uri="{0D108BD9-81ED-4DB2-BD59-A6C34878D82A}">
+                    <a16:rowId xmlns:a16="http://schemas.microsoft.com/office/drawing/2014/main" val="1753849679"/>
+                  </a:ext>
+                </a:extLst>
+              </a:tr>
+              <a:tr h="0">
+                <a:tc>
+                  <a:txBody>
+                    <a:bodyPr/>
+                    <a:lstStyle/>
+                    <a:p>
+                      <a:pPr algn="l" fontAlgn="t">
+                        <a:lnSpc>
+                          <a:spcPts val="1800"/>
+                        </a:lnSpc>
+                        <a:buNone/>
+                      </a:pPr>
+                      <a:r>
+                        <a:rPr lang="en-IN">
+                          <a:solidFill>
+                            <a:srgbClr val="404040"/>
+                          </a:solidFill>
+                          <a:effectLst/>
+                          <a:latin typeface="Courier New" panose="02070309020205020404" pitchFamily="49" charset="0"/>
+                        </a:rPr>
+                        <a:t>INTEGER</a:t>
+                      </a:r>
+                      <a:endParaRPr lang="en-IN">
+                        <a:effectLst/>
+                      </a:endParaRPr>
+                    </a:p>
+                  </a:txBody>
+                  <a:tcPr marL="60960" marR="60960" marT="60960" marB="60960">
+                    <a:lnL w="7620" cap="flat" cmpd="sng" algn="ctr">
+                      <a:solidFill>
+                        <a:srgbClr val="BEBEBE"/>
+                      </a:solidFill>
+                      <a:prstDash val="solid"/>
+                      <a:round/>
+                      <a:headEnd type="none" w="med" len="med"/>
+                      <a:tailEnd type="none" w="med" len="med"/>
+                    </a:lnL>
+                    <a:lnR w="7620" cap="flat" cmpd="sng" algn="ctr">
+                      <a:solidFill>
+                        <a:srgbClr val="BEBEBE"/>
+                      </a:solidFill>
+                      <a:prstDash val="solid"/>
+                      <a:round/>
+                      <a:headEnd type="none" w="med" len="med"/>
+                      <a:tailEnd type="none" w="med" len="med"/>
+                    </a:lnR>
+                    <a:lnT w="7620" cap="flat" cmpd="sng" algn="ctr">
+                      <a:solidFill>
+                        <a:srgbClr val="BEBEBE"/>
+                      </a:solidFill>
+                      <a:prstDash val="solid"/>
+                      <a:round/>
+                      <a:headEnd type="none" w="med" len="med"/>
+                      <a:tailEnd type="none" w="med" len="med"/>
+                    </a:lnT>
+                    <a:lnB w="7620" cap="flat" cmpd="sng" algn="ctr">
+                      <a:solidFill>
+                        <a:srgbClr val="BEBEBE"/>
+                      </a:solidFill>
+                      <a:prstDash val="solid"/>
+                      <a:round/>
+                      <a:headEnd type="none" w="med" len="med"/>
+                      <a:tailEnd type="none" w="med" len="med"/>
+                    </a:lnB>
+                    <a:solidFill>
+                      <a:srgbClr val="EFEFEF"/>
+                    </a:solidFill>
+                  </a:tcPr>
+                </a:tc>
+                <a:tc>
+                  <a:txBody>
+                    <a:bodyPr/>
+                    <a:lstStyle/>
+                    <a:p>
+                      <a:pPr algn="l" fontAlgn="t">
+                        <a:lnSpc>
+                          <a:spcPts val="1800"/>
+                        </a:lnSpc>
+                        <a:buNone/>
+                      </a:pPr>
+                      <a:r>
+                        <a:rPr lang="en-IN">
+                          <a:solidFill>
+                            <a:srgbClr val="404040"/>
+                          </a:solidFill>
+                          <a:effectLst/>
+                          <a:latin typeface="Courier New" panose="02070309020205020404" pitchFamily="49" charset="0"/>
+                        </a:rPr>
+                        <a:t>-&gt;,&gt;&gt;&gt;,&gt;&gt;9</a:t>
+                      </a:r>
+                      <a:endParaRPr lang="en-IN">
+                        <a:effectLst/>
+                      </a:endParaRPr>
+                    </a:p>
+                  </a:txBody>
+                  <a:tcPr marL="60960" marR="60960" marT="60960" marB="60960">
+                    <a:lnL w="7620" cap="flat" cmpd="sng" algn="ctr">
+                      <a:solidFill>
+                        <a:srgbClr val="BEBEBE"/>
+                      </a:solidFill>
+                      <a:prstDash val="solid"/>
+                      <a:round/>
+                      <a:headEnd type="none" w="med" len="med"/>
+                      <a:tailEnd type="none" w="med" len="med"/>
+                    </a:lnL>
+                    <a:lnR w="7620" cap="flat" cmpd="sng" algn="ctr">
+                      <a:solidFill>
+                        <a:srgbClr val="BEBEBE"/>
+                      </a:solidFill>
+                      <a:prstDash val="solid"/>
+                      <a:round/>
+                      <a:headEnd type="none" w="med" len="med"/>
+                      <a:tailEnd type="none" w="med" len="med"/>
+                    </a:lnR>
+                    <a:lnT w="7620" cap="flat" cmpd="sng" algn="ctr">
+                      <a:solidFill>
+                        <a:srgbClr val="BEBEBE"/>
+                      </a:solidFill>
+                      <a:prstDash val="solid"/>
+                      <a:round/>
+                      <a:headEnd type="none" w="med" len="med"/>
+                      <a:tailEnd type="none" w="med" len="med"/>
+                    </a:lnT>
+                    <a:lnB w="7620" cap="flat" cmpd="sng" algn="ctr">
+                      <a:solidFill>
+                        <a:srgbClr val="BEBEBE"/>
+                      </a:solidFill>
+                      <a:prstDash val="solid"/>
+                      <a:round/>
+                      <a:headEnd type="none" w="med" len="med"/>
+                      <a:tailEnd type="none" w="med" len="med"/>
+                    </a:lnB>
+                    <a:solidFill>
+                      <a:srgbClr val="EFEFEF"/>
+                    </a:solidFill>
+                  </a:tcPr>
+                </a:tc>
+                <a:extLst>
+                  <a:ext uri="{0D108BD9-81ED-4DB2-BD59-A6C34878D82A}">
+                    <a16:rowId xmlns:a16="http://schemas.microsoft.com/office/drawing/2014/main" val="3036243439"/>
+                  </a:ext>
+                </a:extLst>
+              </a:tr>
+              <a:tr h="0">
+                <a:tc>
+                  <a:txBody>
+                    <a:bodyPr/>
+                    <a:lstStyle/>
+                    <a:p>
+                      <a:pPr algn="l" fontAlgn="t">
+                        <a:lnSpc>
+                          <a:spcPts val="1800"/>
+                        </a:lnSpc>
+                        <a:buNone/>
+                      </a:pPr>
+                      <a:r>
+                        <a:rPr lang="en-IN">
+                          <a:solidFill>
+                            <a:srgbClr val="404040"/>
+                          </a:solidFill>
+                          <a:effectLst/>
+                          <a:latin typeface="Courier New" panose="02070309020205020404" pitchFamily="49" charset="0"/>
+                        </a:rPr>
+                        <a:t>DECIMAL</a:t>
+                      </a:r>
+                      <a:endParaRPr lang="en-IN">
+                        <a:effectLst/>
+                      </a:endParaRPr>
+                    </a:p>
+                  </a:txBody>
+                  <a:tcPr marL="60960" marR="60960" marT="60960" marB="60960">
+                    <a:lnL w="7620" cap="flat" cmpd="sng" algn="ctr">
+                      <a:solidFill>
+                        <a:srgbClr val="BEBEBE"/>
+                      </a:solidFill>
+                      <a:prstDash val="solid"/>
+                      <a:round/>
+                      <a:headEnd type="none" w="med" len="med"/>
+                      <a:tailEnd type="none" w="med" len="med"/>
+                    </a:lnL>
+                    <a:lnR w="7620" cap="flat" cmpd="sng" algn="ctr">
+                      <a:solidFill>
+                        <a:srgbClr val="BEBEBE"/>
+                      </a:solidFill>
+                      <a:prstDash val="solid"/>
+                      <a:round/>
+                      <a:headEnd type="none" w="med" len="med"/>
+                      <a:tailEnd type="none" w="med" len="med"/>
+                    </a:lnR>
+                    <a:lnT w="7620" cap="flat" cmpd="sng" algn="ctr">
+                      <a:solidFill>
+                        <a:srgbClr val="BEBEBE"/>
+                      </a:solidFill>
+                      <a:prstDash val="solid"/>
+                      <a:round/>
+                      <a:headEnd type="none" w="med" len="med"/>
+                      <a:tailEnd type="none" w="med" len="med"/>
+                    </a:lnT>
+                    <a:lnB w="7620" cap="flat" cmpd="sng" algn="ctr">
+                      <a:solidFill>
+                        <a:srgbClr val="BEBEBE"/>
+                      </a:solidFill>
+                      <a:prstDash val="solid"/>
+                      <a:round/>
+                      <a:headEnd type="none" w="med" len="med"/>
+                      <a:tailEnd type="none" w="med" len="med"/>
+                    </a:lnB>
+                    <a:solidFill>
+                      <a:srgbClr val="FFFFFF"/>
+                    </a:solidFill>
+                  </a:tcPr>
+                </a:tc>
+                <a:tc>
+                  <a:txBody>
+                    <a:bodyPr/>
+                    <a:lstStyle/>
+                    <a:p>
+                      <a:pPr algn="l" fontAlgn="t">
+                        <a:lnSpc>
+                          <a:spcPts val="1800"/>
+                        </a:lnSpc>
+                        <a:buNone/>
+                      </a:pPr>
+                      <a:r>
+                        <a:rPr lang="en-IN">
+                          <a:solidFill>
+                            <a:srgbClr val="404040"/>
+                          </a:solidFill>
+                          <a:effectLst/>
+                          <a:latin typeface="Courier New" panose="02070309020205020404" pitchFamily="49" charset="0"/>
+                        </a:rPr>
+                        <a:t>-&gt;&gt;&gt;,&gt;&gt;9.99</a:t>
+                      </a:r>
+                      <a:endParaRPr lang="en-IN">
+                        <a:effectLst/>
+                      </a:endParaRPr>
+                    </a:p>
+                  </a:txBody>
+                  <a:tcPr marL="60960" marR="60960" marT="60960" marB="60960">
+                    <a:lnL w="7620" cap="flat" cmpd="sng" algn="ctr">
+                      <a:solidFill>
+                        <a:srgbClr val="BEBEBE"/>
+                      </a:solidFill>
+                      <a:prstDash val="solid"/>
+                      <a:round/>
+                      <a:headEnd type="none" w="med" len="med"/>
+                      <a:tailEnd type="none" w="med" len="med"/>
+                    </a:lnL>
+                    <a:lnR w="7620" cap="flat" cmpd="sng" algn="ctr">
+                      <a:solidFill>
+                        <a:srgbClr val="BEBEBE"/>
+                      </a:solidFill>
+                      <a:prstDash val="solid"/>
+                      <a:round/>
+                      <a:headEnd type="none" w="med" len="med"/>
+                      <a:tailEnd type="none" w="med" len="med"/>
+                    </a:lnR>
+                    <a:lnT w="7620" cap="flat" cmpd="sng" algn="ctr">
+                      <a:solidFill>
+                        <a:srgbClr val="BEBEBE"/>
+                      </a:solidFill>
+                      <a:prstDash val="solid"/>
+                      <a:round/>
+                      <a:headEnd type="none" w="med" len="med"/>
+                      <a:tailEnd type="none" w="med" len="med"/>
+                    </a:lnT>
+                    <a:lnB w="7620" cap="flat" cmpd="sng" algn="ctr">
+                      <a:solidFill>
+                        <a:srgbClr val="BEBEBE"/>
+                      </a:solidFill>
+                      <a:prstDash val="solid"/>
+                      <a:round/>
+                      <a:headEnd type="none" w="med" len="med"/>
+                      <a:tailEnd type="none" w="med" len="med"/>
+                    </a:lnB>
+                    <a:solidFill>
+                      <a:srgbClr val="FFFFFF"/>
+                    </a:solidFill>
+                  </a:tcPr>
+                </a:tc>
+                <a:extLst>
+                  <a:ext uri="{0D108BD9-81ED-4DB2-BD59-A6C34878D82A}">
+                    <a16:rowId xmlns:a16="http://schemas.microsoft.com/office/drawing/2014/main" val="904445640"/>
+                  </a:ext>
+                </a:extLst>
+              </a:tr>
+              <a:tr h="0">
+                <a:tc>
+                  <a:txBody>
+                    <a:bodyPr/>
+                    <a:lstStyle/>
+                    <a:p>
+                      <a:pPr algn="l" fontAlgn="t">
+                        <a:lnSpc>
+                          <a:spcPts val="1800"/>
+                        </a:lnSpc>
+                        <a:buNone/>
+                      </a:pPr>
+                      <a:r>
+                        <a:rPr lang="en-IN">
+                          <a:solidFill>
+                            <a:srgbClr val="404040"/>
+                          </a:solidFill>
+                          <a:effectLst/>
+                          <a:latin typeface="Courier New" panose="02070309020205020404" pitchFamily="49" charset="0"/>
+                        </a:rPr>
+                        <a:t>LOGICAL</a:t>
+                      </a:r>
+                      <a:endParaRPr lang="en-IN">
+                        <a:effectLst/>
+                      </a:endParaRPr>
+                    </a:p>
+                  </a:txBody>
+                  <a:tcPr marL="60960" marR="60960" marT="60960" marB="60960">
+                    <a:lnL w="7620" cap="flat" cmpd="sng" algn="ctr">
+                      <a:solidFill>
+                        <a:srgbClr val="BEBEBE"/>
+                      </a:solidFill>
+                      <a:prstDash val="solid"/>
+                      <a:round/>
+                      <a:headEnd type="none" w="med" len="med"/>
+                      <a:tailEnd type="none" w="med" len="med"/>
+                    </a:lnL>
+                    <a:lnR w="7620" cap="flat" cmpd="sng" algn="ctr">
+                      <a:solidFill>
+                        <a:srgbClr val="BEBEBE"/>
+                      </a:solidFill>
+                      <a:prstDash val="solid"/>
+                      <a:round/>
+                      <a:headEnd type="none" w="med" len="med"/>
+                      <a:tailEnd type="none" w="med" len="med"/>
+                    </a:lnR>
+                    <a:lnT w="7620" cap="flat" cmpd="sng" algn="ctr">
+                      <a:solidFill>
+                        <a:srgbClr val="BEBEBE"/>
+                      </a:solidFill>
+                      <a:prstDash val="solid"/>
+                      <a:round/>
+                      <a:headEnd type="none" w="med" len="med"/>
+                      <a:tailEnd type="none" w="med" len="med"/>
+                    </a:lnT>
+                    <a:lnB w="7620" cap="flat" cmpd="sng" algn="ctr">
+                      <a:solidFill>
+                        <a:srgbClr val="BEBEBE"/>
+                      </a:solidFill>
+                      <a:prstDash val="solid"/>
+                      <a:round/>
+                      <a:headEnd type="none" w="med" len="med"/>
+                      <a:tailEnd type="none" w="med" len="med"/>
+                    </a:lnB>
+                    <a:solidFill>
+                      <a:srgbClr val="EFEFEF"/>
+                    </a:solidFill>
+                  </a:tcPr>
+                </a:tc>
+                <a:tc>
+                  <a:txBody>
+                    <a:bodyPr/>
+                    <a:lstStyle/>
+                    <a:p>
+                      <a:pPr algn="l" fontAlgn="t">
+                        <a:lnSpc>
+                          <a:spcPts val="1800"/>
+                        </a:lnSpc>
+                        <a:buNone/>
+                      </a:pPr>
+                      <a:r>
+                        <a:rPr lang="en-IN">
+                          <a:solidFill>
+                            <a:srgbClr val="404040"/>
+                          </a:solidFill>
+                          <a:effectLst/>
+                          <a:latin typeface="Courier New" panose="02070309020205020404" pitchFamily="49" charset="0"/>
+                        </a:rPr>
+                        <a:t>yes/no</a:t>
+                      </a:r>
+                      <a:endParaRPr lang="en-IN">
+                        <a:effectLst/>
+                      </a:endParaRPr>
+                    </a:p>
+                  </a:txBody>
+                  <a:tcPr marL="60960" marR="60960" marT="60960" marB="60960">
+                    <a:lnL w="7620" cap="flat" cmpd="sng" algn="ctr">
+                      <a:solidFill>
+                        <a:srgbClr val="BEBEBE"/>
+                      </a:solidFill>
+                      <a:prstDash val="solid"/>
+                      <a:round/>
+                      <a:headEnd type="none" w="med" len="med"/>
+                      <a:tailEnd type="none" w="med" len="med"/>
+                    </a:lnL>
+                    <a:lnR w="7620" cap="flat" cmpd="sng" algn="ctr">
+                      <a:solidFill>
+                        <a:srgbClr val="BEBEBE"/>
+                      </a:solidFill>
+                      <a:prstDash val="solid"/>
+                      <a:round/>
+                      <a:headEnd type="none" w="med" len="med"/>
+                      <a:tailEnd type="none" w="med" len="med"/>
+                    </a:lnR>
+                    <a:lnT w="7620" cap="flat" cmpd="sng" algn="ctr">
+                      <a:solidFill>
+                        <a:srgbClr val="BEBEBE"/>
+                      </a:solidFill>
+                      <a:prstDash val="solid"/>
+                      <a:round/>
+                      <a:headEnd type="none" w="med" len="med"/>
+                      <a:tailEnd type="none" w="med" len="med"/>
+                    </a:lnT>
+                    <a:lnB w="7620" cap="flat" cmpd="sng" algn="ctr">
+                      <a:solidFill>
+                        <a:srgbClr val="BEBEBE"/>
+                      </a:solidFill>
+                      <a:prstDash val="solid"/>
+                      <a:round/>
+                      <a:headEnd type="none" w="med" len="med"/>
+                      <a:tailEnd type="none" w="med" len="med"/>
+                    </a:lnB>
+                    <a:solidFill>
+                      <a:srgbClr val="EFEFEF"/>
+                    </a:solidFill>
+                  </a:tcPr>
+                </a:tc>
+                <a:extLst>
+                  <a:ext uri="{0D108BD9-81ED-4DB2-BD59-A6C34878D82A}">
+                    <a16:rowId xmlns:a16="http://schemas.microsoft.com/office/drawing/2014/main" val="579061889"/>
+                  </a:ext>
+                </a:extLst>
+              </a:tr>
+              <a:tr h="0">
+                <a:tc>
+                  <a:txBody>
+                    <a:bodyPr/>
+                    <a:lstStyle/>
+                    <a:p>
+                      <a:pPr algn="l" fontAlgn="t">
+                        <a:lnSpc>
+                          <a:spcPts val="1800"/>
+                        </a:lnSpc>
+                        <a:buNone/>
+                      </a:pPr>
+                      <a:r>
+                        <a:rPr lang="en-IN">
+                          <a:solidFill>
+                            <a:srgbClr val="404040"/>
+                          </a:solidFill>
+                          <a:effectLst/>
+                          <a:latin typeface="Courier New" panose="02070309020205020404" pitchFamily="49" charset="0"/>
+                        </a:rPr>
+                        <a:t>DATE</a:t>
+                      </a:r>
+                      <a:endParaRPr lang="en-IN">
+                        <a:effectLst/>
+                      </a:endParaRPr>
+                    </a:p>
+                  </a:txBody>
+                  <a:tcPr marL="60960" marR="60960" marT="60960" marB="60960">
+                    <a:lnL w="7620" cap="flat" cmpd="sng" algn="ctr">
+                      <a:solidFill>
+                        <a:srgbClr val="BEBEBE"/>
+                      </a:solidFill>
+                      <a:prstDash val="solid"/>
+                      <a:round/>
+                      <a:headEnd type="none" w="med" len="med"/>
+                      <a:tailEnd type="none" w="med" len="med"/>
+                    </a:lnL>
+                    <a:lnR w="7620" cap="flat" cmpd="sng" algn="ctr">
+                      <a:solidFill>
+                        <a:srgbClr val="BEBEBE"/>
+                      </a:solidFill>
+                      <a:prstDash val="solid"/>
+                      <a:round/>
+                      <a:headEnd type="none" w="med" len="med"/>
+                      <a:tailEnd type="none" w="med" len="med"/>
+                    </a:lnR>
+                    <a:lnT w="7620" cap="flat" cmpd="sng" algn="ctr">
+                      <a:solidFill>
+                        <a:srgbClr val="BEBEBE"/>
+                      </a:solidFill>
+                      <a:prstDash val="solid"/>
+                      <a:round/>
+                      <a:headEnd type="none" w="med" len="med"/>
+                      <a:tailEnd type="none" w="med" len="med"/>
+                    </a:lnT>
+                    <a:lnB w="7620" cap="flat" cmpd="sng" algn="ctr">
+                      <a:solidFill>
+                        <a:srgbClr val="BEBEBE"/>
+                      </a:solidFill>
+                      <a:prstDash val="solid"/>
+                      <a:round/>
+                      <a:headEnd type="none" w="med" len="med"/>
+                      <a:tailEnd type="none" w="med" len="med"/>
+                    </a:lnB>
+                    <a:solidFill>
+                      <a:srgbClr val="FFFFFF"/>
+                    </a:solidFill>
+                  </a:tcPr>
+                </a:tc>
+                <a:tc>
+                  <a:txBody>
+                    <a:bodyPr/>
+                    <a:lstStyle/>
+                    <a:p>
+                      <a:pPr algn="l" fontAlgn="t">
+                        <a:lnSpc>
+                          <a:spcPts val="1800"/>
+                        </a:lnSpc>
+                        <a:buNone/>
+                      </a:pPr>
+                      <a:r>
+                        <a:rPr lang="en-IN">
+                          <a:solidFill>
+                            <a:srgbClr val="404040"/>
+                          </a:solidFill>
+                          <a:effectLst/>
+                          <a:latin typeface="Courier New" panose="02070309020205020404" pitchFamily="49" charset="0"/>
+                        </a:rPr>
+                        <a:t>99/99/99</a:t>
+                      </a:r>
+                      <a:endParaRPr lang="en-IN">
+                        <a:effectLst/>
+                      </a:endParaRPr>
+                    </a:p>
+                  </a:txBody>
+                  <a:tcPr marL="60960" marR="60960" marT="60960" marB="60960">
+                    <a:lnL w="7620" cap="flat" cmpd="sng" algn="ctr">
+                      <a:solidFill>
+                        <a:srgbClr val="BEBEBE"/>
+                      </a:solidFill>
+                      <a:prstDash val="solid"/>
+                      <a:round/>
+                      <a:headEnd type="none" w="med" len="med"/>
+                      <a:tailEnd type="none" w="med" len="med"/>
+                    </a:lnL>
+                    <a:lnR w="7620" cap="flat" cmpd="sng" algn="ctr">
+                      <a:solidFill>
+                        <a:srgbClr val="BEBEBE"/>
+                      </a:solidFill>
+                      <a:prstDash val="solid"/>
+                      <a:round/>
+                      <a:headEnd type="none" w="med" len="med"/>
+                      <a:tailEnd type="none" w="med" len="med"/>
+                    </a:lnR>
+                    <a:lnT w="7620" cap="flat" cmpd="sng" algn="ctr">
+                      <a:solidFill>
+                        <a:srgbClr val="BEBEBE"/>
+                      </a:solidFill>
+                      <a:prstDash val="solid"/>
+                      <a:round/>
+                      <a:headEnd type="none" w="med" len="med"/>
+                      <a:tailEnd type="none" w="med" len="med"/>
+                    </a:lnT>
+                    <a:lnB w="7620" cap="flat" cmpd="sng" algn="ctr">
+                      <a:solidFill>
+                        <a:srgbClr val="BEBEBE"/>
+                      </a:solidFill>
+                      <a:prstDash val="solid"/>
+                      <a:round/>
+                      <a:headEnd type="none" w="med" len="med"/>
+                      <a:tailEnd type="none" w="med" len="med"/>
+                    </a:lnB>
+                    <a:solidFill>
+                      <a:srgbClr val="FFFFFF"/>
+                    </a:solidFill>
+                  </a:tcPr>
+                </a:tc>
+                <a:extLst>
+                  <a:ext uri="{0D108BD9-81ED-4DB2-BD59-A6C34878D82A}">
+                    <a16:rowId xmlns:a16="http://schemas.microsoft.com/office/drawing/2014/main" val="2119410448"/>
+                  </a:ext>
+                </a:extLst>
+              </a:tr>
+              <a:tr h="0">
+                <a:tc>
+                  <a:txBody>
+                    <a:bodyPr/>
+                    <a:lstStyle/>
+                    <a:p>
+                      <a:pPr algn="l" fontAlgn="t">
+                        <a:lnSpc>
+                          <a:spcPts val="1800"/>
+                        </a:lnSpc>
+                        <a:buNone/>
+                      </a:pPr>
+                      <a:r>
+                        <a:rPr lang="en-IN">
+                          <a:solidFill>
+                            <a:srgbClr val="404040"/>
+                          </a:solidFill>
+                          <a:effectLst/>
+                          <a:latin typeface="Courier New" panose="02070309020205020404" pitchFamily="49" charset="0"/>
+                        </a:rPr>
+                        <a:t>DATETIME</a:t>
+                      </a:r>
+                      <a:endParaRPr lang="en-IN">
+                        <a:effectLst/>
+                      </a:endParaRPr>
+                    </a:p>
+                  </a:txBody>
+                  <a:tcPr marL="60960" marR="60960" marT="60960" marB="60960">
+                    <a:lnL w="7620" cap="flat" cmpd="sng" algn="ctr">
+                      <a:solidFill>
+                        <a:srgbClr val="BEBEBE"/>
+                      </a:solidFill>
+                      <a:prstDash val="solid"/>
+                      <a:round/>
+                      <a:headEnd type="none" w="med" len="med"/>
+                      <a:tailEnd type="none" w="med" len="med"/>
+                    </a:lnL>
+                    <a:lnR w="7620" cap="flat" cmpd="sng" algn="ctr">
+                      <a:solidFill>
+                        <a:srgbClr val="BEBEBE"/>
+                      </a:solidFill>
+                      <a:prstDash val="solid"/>
+                      <a:round/>
+                      <a:headEnd type="none" w="med" len="med"/>
+                      <a:tailEnd type="none" w="med" len="med"/>
+                    </a:lnR>
+                    <a:lnT w="7620" cap="flat" cmpd="sng" algn="ctr">
+                      <a:solidFill>
+                        <a:srgbClr val="BEBEBE"/>
+                      </a:solidFill>
+                      <a:prstDash val="solid"/>
+                      <a:round/>
+                      <a:headEnd type="none" w="med" len="med"/>
+                      <a:tailEnd type="none" w="med" len="med"/>
+                    </a:lnT>
+                    <a:lnB w="7620" cap="flat" cmpd="sng" algn="ctr">
+                      <a:solidFill>
+                        <a:srgbClr val="BEBEBE"/>
+                      </a:solidFill>
+                      <a:prstDash val="solid"/>
+                      <a:round/>
+                      <a:headEnd type="none" w="med" len="med"/>
+                      <a:tailEnd type="none" w="med" len="med"/>
+                    </a:lnB>
+                    <a:solidFill>
+                      <a:srgbClr val="EFEFEF"/>
+                    </a:solidFill>
+                  </a:tcPr>
+                </a:tc>
+                <a:tc>
+                  <a:txBody>
+                    <a:bodyPr/>
+                    <a:lstStyle/>
+                    <a:p>
+                      <a:pPr algn="l" fontAlgn="t">
+                        <a:lnSpc>
+                          <a:spcPts val="1800"/>
+                        </a:lnSpc>
+                        <a:buNone/>
+                      </a:pPr>
+                      <a:r>
+                        <a:rPr lang="en-IN">
+                          <a:solidFill>
+                            <a:srgbClr val="404040"/>
+                          </a:solidFill>
+                          <a:effectLst/>
+                          <a:latin typeface="Courier New" panose="02070309020205020404" pitchFamily="49" charset="0"/>
+                        </a:rPr>
+                        <a:t>99/99/99 hh:mm:ss</a:t>
+                      </a:r>
+                      <a:endParaRPr lang="en-IN">
+                        <a:effectLst/>
+                      </a:endParaRPr>
+                    </a:p>
+                  </a:txBody>
+                  <a:tcPr marL="60960" marR="60960" marT="60960" marB="60960">
+                    <a:lnL w="7620" cap="flat" cmpd="sng" algn="ctr">
+                      <a:solidFill>
+                        <a:srgbClr val="BEBEBE"/>
+                      </a:solidFill>
+                      <a:prstDash val="solid"/>
+                      <a:round/>
+                      <a:headEnd type="none" w="med" len="med"/>
+                      <a:tailEnd type="none" w="med" len="med"/>
+                    </a:lnL>
+                    <a:lnR w="7620" cap="flat" cmpd="sng" algn="ctr">
+                      <a:solidFill>
+                        <a:srgbClr val="BEBEBE"/>
+                      </a:solidFill>
+                      <a:prstDash val="solid"/>
+                      <a:round/>
+                      <a:headEnd type="none" w="med" len="med"/>
+                      <a:tailEnd type="none" w="med" len="med"/>
+                    </a:lnR>
+                    <a:lnT w="7620" cap="flat" cmpd="sng" algn="ctr">
+                      <a:solidFill>
+                        <a:srgbClr val="BEBEBE"/>
+                      </a:solidFill>
+                      <a:prstDash val="solid"/>
+                      <a:round/>
+                      <a:headEnd type="none" w="med" len="med"/>
+                      <a:tailEnd type="none" w="med" len="med"/>
+                    </a:lnT>
+                    <a:lnB w="7620" cap="flat" cmpd="sng" algn="ctr">
+                      <a:solidFill>
+                        <a:srgbClr val="BEBEBE"/>
+                      </a:solidFill>
+                      <a:prstDash val="solid"/>
+                      <a:round/>
+                      <a:headEnd type="none" w="med" len="med"/>
+                      <a:tailEnd type="none" w="med" len="med"/>
+                    </a:lnB>
+                    <a:solidFill>
+                      <a:srgbClr val="EFEFEF"/>
+                    </a:solidFill>
+                  </a:tcPr>
+                </a:tc>
+                <a:extLst>
+                  <a:ext uri="{0D108BD9-81ED-4DB2-BD59-A6C34878D82A}">
+                    <a16:rowId xmlns:a16="http://schemas.microsoft.com/office/drawing/2014/main" val="2946447465"/>
+                  </a:ext>
+                </a:extLst>
+              </a:tr>
+              <a:tr h="0">
+                <a:tc>
+                  <a:txBody>
+                    <a:bodyPr/>
+                    <a:lstStyle/>
+                    <a:p>
+                      <a:pPr algn="l" fontAlgn="t">
+                        <a:lnSpc>
+                          <a:spcPts val="1800"/>
+                        </a:lnSpc>
+                        <a:buNone/>
+                      </a:pPr>
+                      <a:r>
+                        <a:rPr lang="en-IN">
+                          <a:solidFill>
+                            <a:srgbClr val="404040"/>
+                          </a:solidFill>
+                          <a:effectLst/>
+                          <a:latin typeface="Courier New" panose="02070309020205020404" pitchFamily="49" charset="0"/>
+                        </a:rPr>
+                        <a:t>DATETIME-TZ</a:t>
+                      </a:r>
+                      <a:endParaRPr lang="en-IN">
+                        <a:effectLst/>
+                      </a:endParaRPr>
+                    </a:p>
+                  </a:txBody>
+                  <a:tcPr marL="60960" marR="60960" marT="60960" marB="60960">
+                    <a:lnL w="7620" cap="flat" cmpd="sng" algn="ctr">
+                      <a:solidFill>
+                        <a:srgbClr val="BEBEBE"/>
+                      </a:solidFill>
+                      <a:prstDash val="solid"/>
+                      <a:round/>
+                      <a:headEnd type="none" w="med" len="med"/>
+                      <a:tailEnd type="none" w="med" len="med"/>
+                    </a:lnL>
+                    <a:lnR w="7620" cap="flat" cmpd="sng" algn="ctr">
+                      <a:solidFill>
+                        <a:srgbClr val="BEBEBE"/>
+                      </a:solidFill>
+                      <a:prstDash val="solid"/>
+                      <a:round/>
+                      <a:headEnd type="none" w="med" len="med"/>
+                      <a:tailEnd type="none" w="med" len="med"/>
+                    </a:lnR>
+                    <a:lnT w="7620" cap="flat" cmpd="sng" algn="ctr">
+                      <a:solidFill>
+                        <a:srgbClr val="BEBEBE"/>
+                      </a:solidFill>
+                      <a:prstDash val="solid"/>
+                      <a:round/>
+                      <a:headEnd type="none" w="med" len="med"/>
+                      <a:tailEnd type="none" w="med" len="med"/>
+                    </a:lnT>
+                    <a:lnB w="7620" cap="flat" cmpd="sng" algn="ctr">
+                      <a:solidFill>
+                        <a:srgbClr val="BEBEBE"/>
+                      </a:solidFill>
+                      <a:prstDash val="solid"/>
+                      <a:round/>
+                      <a:headEnd type="none" w="med" len="med"/>
+                      <a:tailEnd type="none" w="med" len="med"/>
+                    </a:lnB>
+                    <a:solidFill>
+                      <a:srgbClr val="FFFFFF"/>
+                    </a:solidFill>
+                  </a:tcPr>
+                </a:tc>
+                <a:tc>
+                  <a:txBody>
+                    <a:bodyPr/>
+                    <a:lstStyle/>
+                    <a:p>
+                      <a:pPr algn="l" fontAlgn="t">
+                        <a:lnSpc>
+                          <a:spcPts val="1800"/>
+                        </a:lnSpc>
+                        <a:buNone/>
+                      </a:pPr>
+                      <a:r>
+                        <a:rPr lang="en-IN">
+                          <a:solidFill>
+                            <a:srgbClr val="404040"/>
+                          </a:solidFill>
+                          <a:effectLst/>
+                          <a:latin typeface="Courier New" panose="02070309020205020404" pitchFamily="49" charset="0"/>
+                        </a:rPr>
+                        <a:t>99/99/99 hh:mm:ss -TZ</a:t>
+                      </a:r>
+                      <a:endParaRPr lang="en-IN">
+                        <a:effectLst/>
+                      </a:endParaRPr>
+                    </a:p>
+                  </a:txBody>
+                  <a:tcPr marL="60960" marR="60960" marT="60960" marB="60960">
+                    <a:lnL w="7620" cap="flat" cmpd="sng" algn="ctr">
+                      <a:solidFill>
+                        <a:srgbClr val="BEBEBE"/>
+                      </a:solidFill>
+                      <a:prstDash val="solid"/>
+                      <a:round/>
+                      <a:headEnd type="none" w="med" len="med"/>
+                      <a:tailEnd type="none" w="med" len="med"/>
+                    </a:lnL>
+                    <a:lnR w="7620" cap="flat" cmpd="sng" algn="ctr">
+                      <a:solidFill>
+                        <a:srgbClr val="BEBEBE"/>
+                      </a:solidFill>
+                      <a:prstDash val="solid"/>
+                      <a:round/>
+                      <a:headEnd type="none" w="med" len="med"/>
+                      <a:tailEnd type="none" w="med" len="med"/>
+                    </a:lnR>
+                    <a:lnT w="7620" cap="flat" cmpd="sng" algn="ctr">
+                      <a:solidFill>
+                        <a:srgbClr val="BEBEBE"/>
+                      </a:solidFill>
+                      <a:prstDash val="solid"/>
+                      <a:round/>
+                      <a:headEnd type="none" w="med" len="med"/>
+                      <a:tailEnd type="none" w="med" len="med"/>
+                    </a:lnT>
+                    <a:lnB w="7620" cap="flat" cmpd="sng" algn="ctr">
+                      <a:solidFill>
+                        <a:srgbClr val="BEBEBE"/>
+                      </a:solidFill>
+                      <a:prstDash val="solid"/>
+                      <a:round/>
+                      <a:headEnd type="none" w="med" len="med"/>
+                      <a:tailEnd type="none" w="med" len="med"/>
+                    </a:lnB>
+                    <a:solidFill>
+                      <a:srgbClr val="FFFFFF"/>
+                    </a:solidFill>
+                  </a:tcPr>
+                </a:tc>
+                <a:extLst>
+                  <a:ext uri="{0D108BD9-81ED-4DB2-BD59-A6C34878D82A}">
+                    <a16:rowId xmlns:a16="http://schemas.microsoft.com/office/drawing/2014/main" val="2835956637"/>
+                  </a:ext>
+                </a:extLst>
+              </a:tr>
+              <a:tr h="0">
+                <a:tc>
+                  <a:txBody>
+                    <a:bodyPr/>
+                    <a:lstStyle/>
+                    <a:p>
+                      <a:pPr algn="l" fontAlgn="t">
+                        <a:lnSpc>
+                          <a:spcPts val="1800"/>
+                        </a:lnSpc>
+                        <a:buNone/>
+                      </a:pPr>
+                      <a:r>
+                        <a:rPr lang="en-IN">
+                          <a:solidFill>
+                            <a:srgbClr val="404040"/>
+                          </a:solidFill>
+                          <a:effectLst/>
+                          <a:latin typeface="Courier New" panose="02070309020205020404" pitchFamily="49" charset="0"/>
+                        </a:rPr>
+                        <a:t>ROWID</a:t>
+                      </a:r>
+                      <a:endParaRPr lang="en-IN">
+                        <a:effectLst/>
+                      </a:endParaRPr>
+                    </a:p>
+                  </a:txBody>
+                  <a:tcPr marL="60960" marR="60960" marT="60960" marB="60960">
+                    <a:lnL w="7620" cap="flat" cmpd="sng" algn="ctr">
+                      <a:solidFill>
+                        <a:srgbClr val="BEBEBE"/>
+                      </a:solidFill>
+                      <a:prstDash val="solid"/>
+                      <a:round/>
+                      <a:headEnd type="none" w="med" len="med"/>
+                      <a:tailEnd type="none" w="med" len="med"/>
+                    </a:lnL>
+                    <a:lnR w="7620" cap="flat" cmpd="sng" algn="ctr">
+                      <a:solidFill>
+                        <a:srgbClr val="BEBEBE"/>
+                      </a:solidFill>
+                      <a:prstDash val="solid"/>
+                      <a:round/>
+                      <a:headEnd type="none" w="med" len="med"/>
+                      <a:tailEnd type="none" w="med" len="med"/>
+                    </a:lnR>
+                    <a:lnT w="7620" cap="flat" cmpd="sng" algn="ctr">
+                      <a:solidFill>
+                        <a:srgbClr val="BEBEBE"/>
+                      </a:solidFill>
+                      <a:prstDash val="solid"/>
+                      <a:round/>
+                      <a:headEnd type="none" w="med" len="med"/>
+                      <a:tailEnd type="none" w="med" len="med"/>
+                    </a:lnT>
+                    <a:lnB w="7620" cap="flat" cmpd="sng" algn="ctr">
+                      <a:solidFill>
+                        <a:srgbClr val="BEBEBE"/>
+                      </a:solidFill>
+                      <a:prstDash val="solid"/>
+                      <a:round/>
+                      <a:headEnd type="none" w="med" len="med"/>
+                      <a:tailEnd type="none" w="med" len="med"/>
+                    </a:lnB>
+                    <a:solidFill>
+                      <a:srgbClr val="EFEFEF"/>
+                    </a:solidFill>
+                  </a:tcPr>
+                </a:tc>
+                <a:tc>
+                  <a:txBody>
+                    <a:bodyPr/>
+                    <a:lstStyle/>
+                    <a:p>
+                      <a:pPr algn="l" fontAlgn="t">
+                        <a:lnSpc>
+                          <a:spcPts val="1800"/>
+                        </a:lnSpc>
+                        <a:buNone/>
+                      </a:pPr>
+                      <a:r>
+                        <a:rPr lang="en-IN">
+                          <a:solidFill>
+                            <a:srgbClr val="404040"/>
+                          </a:solidFill>
+                          <a:effectLst/>
+                          <a:latin typeface="Courier New" panose="02070309020205020404" pitchFamily="49" charset="0"/>
+                        </a:rPr>
+                        <a:t>&gt;&gt;&gt;&gt;&gt;&gt;9</a:t>
+                      </a:r>
+                      <a:endParaRPr lang="en-IN">
+                        <a:effectLst/>
+                      </a:endParaRPr>
+                    </a:p>
+                  </a:txBody>
+                  <a:tcPr marL="60960" marR="60960" marT="60960" marB="60960">
+                    <a:lnL w="7620" cap="flat" cmpd="sng" algn="ctr">
+                      <a:solidFill>
+                        <a:srgbClr val="BEBEBE"/>
+                      </a:solidFill>
+                      <a:prstDash val="solid"/>
+                      <a:round/>
+                      <a:headEnd type="none" w="med" len="med"/>
+                      <a:tailEnd type="none" w="med" len="med"/>
+                    </a:lnL>
+                    <a:lnR w="7620" cap="flat" cmpd="sng" algn="ctr">
+                      <a:solidFill>
+                        <a:srgbClr val="BEBEBE"/>
+                      </a:solidFill>
+                      <a:prstDash val="solid"/>
+                      <a:round/>
+                      <a:headEnd type="none" w="med" len="med"/>
+                      <a:tailEnd type="none" w="med" len="med"/>
+                    </a:lnR>
+                    <a:lnT w="7620" cap="flat" cmpd="sng" algn="ctr">
+                      <a:solidFill>
+                        <a:srgbClr val="BEBEBE"/>
+                      </a:solidFill>
+                      <a:prstDash val="solid"/>
+                      <a:round/>
+                      <a:headEnd type="none" w="med" len="med"/>
+                      <a:tailEnd type="none" w="med" len="med"/>
+                    </a:lnT>
+                    <a:lnB w="7620" cap="flat" cmpd="sng" algn="ctr">
+                      <a:solidFill>
+                        <a:srgbClr val="BEBEBE"/>
+                      </a:solidFill>
+                      <a:prstDash val="solid"/>
+                      <a:round/>
+                      <a:headEnd type="none" w="med" len="med"/>
+                      <a:tailEnd type="none" w="med" len="med"/>
+                    </a:lnB>
+                    <a:solidFill>
+                      <a:srgbClr val="EFEFEF"/>
+                    </a:solidFill>
+                  </a:tcPr>
+                </a:tc>
+                <a:extLst>
+                  <a:ext uri="{0D108BD9-81ED-4DB2-BD59-A6C34878D82A}">
+                    <a16:rowId xmlns:a16="http://schemas.microsoft.com/office/drawing/2014/main" val="3803484708"/>
+                  </a:ext>
+                </a:extLst>
+              </a:tr>
+              <a:tr h="0">
+                <a:tc>
+                  <a:txBody>
+                    <a:bodyPr/>
+                    <a:lstStyle/>
+                    <a:p>
+                      <a:pPr algn="l" fontAlgn="t">
+                        <a:lnSpc>
+                          <a:spcPts val="1800"/>
+                        </a:lnSpc>
+                        <a:buNone/>
+                      </a:pPr>
+                      <a:r>
+                        <a:rPr lang="en-IN">
+                          <a:solidFill>
+                            <a:srgbClr val="404040"/>
+                          </a:solidFill>
+                          <a:effectLst/>
+                          <a:latin typeface="Courier New" panose="02070309020205020404" pitchFamily="49" charset="0"/>
+                        </a:rPr>
+                        <a:t>HANDLE</a:t>
+                      </a:r>
+                      <a:endParaRPr lang="en-IN">
+                        <a:effectLst/>
+                      </a:endParaRPr>
+                    </a:p>
+                  </a:txBody>
+                  <a:tcPr marL="60960" marR="60960" marT="60960" marB="60960">
+                    <a:lnL w="7620" cap="flat" cmpd="sng" algn="ctr">
+                      <a:solidFill>
+                        <a:srgbClr val="BEBEBE"/>
+                      </a:solidFill>
+                      <a:prstDash val="solid"/>
+                      <a:round/>
+                      <a:headEnd type="none" w="med" len="med"/>
+                      <a:tailEnd type="none" w="med" len="med"/>
+                    </a:lnL>
+                    <a:lnR w="7620" cap="flat" cmpd="sng" algn="ctr">
+                      <a:solidFill>
+                        <a:srgbClr val="BEBEBE"/>
+                      </a:solidFill>
+                      <a:prstDash val="solid"/>
+                      <a:round/>
+                      <a:headEnd type="none" w="med" len="med"/>
+                      <a:tailEnd type="none" w="med" len="med"/>
+                    </a:lnR>
+                    <a:lnT w="7620" cap="flat" cmpd="sng" algn="ctr">
+                      <a:solidFill>
+                        <a:srgbClr val="BEBEBE"/>
+                      </a:solidFill>
+                      <a:prstDash val="solid"/>
+                      <a:round/>
+                      <a:headEnd type="none" w="med" len="med"/>
+                      <a:tailEnd type="none" w="med" len="med"/>
+                    </a:lnT>
+                    <a:lnB w="7620" cap="flat" cmpd="sng" algn="ctr">
+                      <a:solidFill>
+                        <a:srgbClr val="BEBEBE"/>
+                      </a:solidFill>
+                      <a:prstDash val="solid"/>
+                      <a:round/>
+                      <a:headEnd type="none" w="med" len="med"/>
+                      <a:tailEnd type="none" w="med" len="med"/>
+                    </a:lnB>
+                    <a:solidFill>
+                      <a:srgbClr val="FFFFFF"/>
+                    </a:solidFill>
+                  </a:tcPr>
+                </a:tc>
+                <a:tc>
+                  <a:txBody>
+                    <a:bodyPr/>
+                    <a:lstStyle/>
+                    <a:p>
+                      <a:pPr algn="l" fontAlgn="t">
+                        <a:lnSpc>
+                          <a:spcPts val="1800"/>
+                        </a:lnSpc>
+                        <a:buNone/>
+                      </a:pPr>
+                      <a:r>
+                        <a:rPr lang="en-IN" dirty="0">
+                          <a:solidFill>
+                            <a:srgbClr val="404040"/>
+                          </a:solidFill>
+                          <a:effectLst/>
+                          <a:latin typeface="Courier New" panose="02070309020205020404" pitchFamily="49" charset="0"/>
+                        </a:rPr>
+                        <a:t>&gt;&gt;&gt;&gt;&gt;&gt;9</a:t>
+                      </a:r>
+                      <a:endParaRPr lang="en-IN" dirty="0">
+                        <a:effectLst/>
+                      </a:endParaRPr>
+                    </a:p>
+                  </a:txBody>
+                  <a:tcPr marL="60960" marR="60960" marT="60960" marB="60960">
+                    <a:lnL w="7620" cap="flat" cmpd="sng" algn="ctr">
+                      <a:solidFill>
+                        <a:srgbClr val="BEBEBE"/>
+                      </a:solidFill>
+                      <a:prstDash val="solid"/>
+                      <a:round/>
+                      <a:headEnd type="none" w="med" len="med"/>
+                      <a:tailEnd type="none" w="med" len="med"/>
+                    </a:lnL>
+                    <a:lnR w="7620" cap="flat" cmpd="sng" algn="ctr">
+                      <a:solidFill>
+                        <a:srgbClr val="BEBEBE"/>
+                      </a:solidFill>
+                      <a:prstDash val="solid"/>
+                      <a:round/>
+                      <a:headEnd type="none" w="med" len="med"/>
+                      <a:tailEnd type="none" w="med" len="med"/>
+                    </a:lnR>
+                    <a:lnT w="7620" cap="flat" cmpd="sng" algn="ctr">
+                      <a:solidFill>
+                        <a:srgbClr val="BEBEBE"/>
+                      </a:solidFill>
+                      <a:prstDash val="solid"/>
+                      <a:round/>
+                      <a:headEnd type="none" w="med" len="med"/>
+                      <a:tailEnd type="none" w="med" len="med"/>
+                    </a:lnT>
+                    <a:lnB w="7620" cap="flat" cmpd="sng" algn="ctr">
+                      <a:solidFill>
+                        <a:srgbClr val="BEBEBE"/>
+                      </a:solidFill>
+                      <a:prstDash val="solid"/>
+                      <a:round/>
+                      <a:headEnd type="none" w="med" len="med"/>
+                      <a:tailEnd type="none" w="med" len="med"/>
+                    </a:lnB>
+                    <a:solidFill>
+                      <a:srgbClr val="FFFFFF"/>
+                    </a:solidFill>
+                  </a:tcPr>
+                </a:tc>
+                <a:extLst>
+                  <a:ext uri="{0D108BD9-81ED-4DB2-BD59-A6C34878D82A}">
+                    <a16:rowId xmlns:a16="http://schemas.microsoft.com/office/drawing/2014/main" val="36454942"/>
+                  </a:ext>
+                </a:extLst>
+              </a:tr>
+            </a:tbl>
+          </a:graphicData>
+        </a:graphic>
+      </p:graphicFrame>
     </p:spTree>
   </p:cSld>
   <p:clrMapOvr>
@@ -4049,7 +6931,7 @@
 </file>
 
 <file path=ppt/slides/slide9.xml><?xml version="1.0" encoding="utf-8"?>
-<p:sld xmlns:a="http://schemas.openxmlformats.org/drawingml/2006/main" xmlns:p="http://schemas.openxmlformats.org/presentationml/2006/main" xmlns:r="http://schemas.openxmlformats.org/officeDocument/2006/relationships">
+<p:sld xmlns:a="http://schemas.openxmlformats.org/drawingml/2006/main" xmlns:r="http://schemas.openxmlformats.org/officeDocument/2006/relationships" xmlns:p="http://schemas.openxmlformats.org/presentationml/2006/main">
   <p:cSld>
     <p:spTree>
       <p:nvGrpSpPr>
@@ -4057,7 +6939,14 @@
         <p:cNvGrpSpPr/>
         <p:nvPr/>
       </p:nvGrpSpPr>
-      <p:grpSpPr/>
+      <p:grpSpPr>
+        <a:xfrm>
+          <a:off x="0" y="0"/>
+          <a:ext cx="0" cy="0"/>
+          <a:chOff x="0" y="0"/>
+          <a:chExt cx="0" cy="0"/>
+        </a:xfrm>
+      </p:grpSpPr>
       <p:sp>
         <p:nvSpPr>
           <p:cNvPr id="2" name="Title 1"/>
@@ -4094,25 +6983,21 @@
           <a:bodyPr/>
           <a:lstStyle/>
           <a:p>
-            <a:pPr/>
             <a:r>
               <a:t>DEFINE VARIABLE hFile AS HANDLE NO-UNDO.</a:t>
             </a:r>
           </a:p>
           <a:p>
-            <a:pPr/>
             <a:r>
               <a:t>DEFINE VARIABLE dtz AS DATETIME-TZ NO-UNDO.</a:t>
             </a:r>
           </a:p>
           <a:p>
-            <a:pPr/>
             <a:r>
               <a:t>DEFINE VARIABLE i64 AS INT64 NO-UNDO.</a:t>
             </a:r>
           </a:p>
           <a:p>
-            <a:pPr/>
             <a:r>
               <a:t>MESSAGE "Default values and types defined." VIEW-AS ALERT-BOX.</a:t>
             </a:r>
